--- a/Sorting_Algorithms.pptx
+++ b/Sorting_Algorithms.pptx
@@ -5,7 +5,7 @@
     <p:sldMasterId id="2147483648" r:id="rId1"/>
   </p:sldMasterIdLst>
   <p:notesMasterIdLst>
-    <p:notesMasterId r:id="rId12"/>
+    <p:notesMasterId r:id="rId14"/>
   </p:notesMasterIdLst>
   <p:sldIdLst>
     <p:sldId id="256" r:id="rId2"/>
@@ -17,7 +17,9 @@
     <p:sldId id="262" r:id="rId8"/>
     <p:sldId id="263" r:id="rId9"/>
     <p:sldId id="264" r:id="rId10"/>
-    <p:sldId id="266" r:id="rId11"/>
+    <p:sldId id="265" r:id="rId11"/>
+    <p:sldId id="267" r:id="rId12"/>
+    <p:sldId id="266" r:id="rId13"/>
   </p:sldIdLst>
   <p:sldSz cx="12192000" cy="6858000"/>
   <p:notesSz cx="6858000" cy="12192000"/>
@@ -414,6 +416,174 @@
 </p:notes>
 </file>
 
+<file path=ppt/notesSlides/notesSlide11.xml><?xml version="1.0" encoding="utf-8"?>
+<p:notes xmlns:a="http://schemas.openxmlformats.org/drawingml/2006/main" xmlns:r="http://schemas.openxmlformats.org/officeDocument/2006/relationships" xmlns:p="http://schemas.openxmlformats.org/presentationml/2006/main">
+  <p:cSld>
+    <p:spTree>
+      <p:nvGrpSpPr>
+        <p:cNvPr id="1" name=""/>
+        <p:cNvGrpSpPr/>
+        <p:nvPr/>
+      </p:nvGrpSpPr>
+      <p:grpSpPr>
+        <a:xfrm>
+          <a:off x="0" y="0"/>
+          <a:ext cx="0" cy="0"/>
+          <a:chOff x="0" y="0"/>
+          <a:chExt cx="0" cy="0"/>
+        </a:xfrm>
+      </p:grpSpPr>
+      <p:sp>
+        <p:nvSpPr>
+          <p:cNvPr id="2" name="Slide Image Placeholder 1"/>
+          <p:cNvSpPr>
+            <a:spLocks noGrp="1" noRot="1" noChangeAspect="1"/>
+          </p:cNvSpPr>
+          <p:nvPr>
+            <p:ph type="sldImg"/>
+          </p:nvPr>
+        </p:nvSpPr>
+        <p:spPr/>
+      </p:sp>
+      <p:sp>
+        <p:nvSpPr>
+          <p:cNvPr id="3" name="Notes Placeholder 2"/>
+          <p:cNvSpPr>
+            <a:spLocks noGrp="1"/>
+          </p:cNvSpPr>
+          <p:nvPr>
+            <p:ph type="body" idx="1"/>
+          </p:nvPr>
+        </p:nvSpPr>
+        <p:spPr/>
+        <p:txBody>
+          <a:bodyPr/>
+          <a:lstStyle/>
+          <a:p>
+            <a:endParaRPr lang="en-US" dirty="0"/>
+          </a:p>
+        </p:txBody>
+      </p:sp>
+      <p:sp>
+        <p:nvSpPr>
+          <p:cNvPr id="4" name="Slide Number Placeholder 3"/>
+          <p:cNvSpPr>
+            <a:spLocks noGrp="1"/>
+          </p:cNvSpPr>
+          <p:nvPr>
+            <p:ph type="sldNum" sz="quarter" idx="10"/>
+          </p:nvPr>
+        </p:nvSpPr>
+        <p:spPr/>
+        <p:txBody>
+          <a:bodyPr/>
+          <a:lstStyle/>
+          <a:p>
+            <a:fld id="{F7021451-1387-4CA6-816F-3879F97B5CBC}" type="slidenum">
+              <a:rPr lang="en-US"/>
+              <a:t>11</a:t>
+            </a:fld>
+            <a:endParaRPr lang="en-US"/>
+          </a:p>
+        </p:txBody>
+      </p:sp>
+    </p:spTree>
+    <p:extLst>
+      <p:ext uri="{BB962C8B-B14F-4D97-AF65-F5344CB8AC3E}">
+        <p14:creationId xmlns:p14="http://schemas.microsoft.com/office/powerpoint/2010/main" val="1024086991"/>
+      </p:ext>
+    </p:extLst>
+  </p:cSld>
+  <p:clrMapOvr>
+    <a:masterClrMapping/>
+  </p:clrMapOvr>
+</p:notes>
+</file>
+
+<file path=ppt/notesSlides/notesSlide12.xml><?xml version="1.0" encoding="utf-8"?>
+<p:notes xmlns:a="http://schemas.openxmlformats.org/drawingml/2006/main" xmlns:r="http://schemas.openxmlformats.org/officeDocument/2006/relationships" xmlns:p="http://schemas.openxmlformats.org/presentationml/2006/main">
+  <p:cSld>
+    <p:spTree>
+      <p:nvGrpSpPr>
+        <p:cNvPr id="1" name=""/>
+        <p:cNvGrpSpPr/>
+        <p:nvPr/>
+      </p:nvGrpSpPr>
+      <p:grpSpPr>
+        <a:xfrm>
+          <a:off x="0" y="0"/>
+          <a:ext cx="0" cy="0"/>
+          <a:chOff x="0" y="0"/>
+          <a:chExt cx="0" cy="0"/>
+        </a:xfrm>
+      </p:grpSpPr>
+      <p:sp>
+        <p:nvSpPr>
+          <p:cNvPr id="2" name="Slide Image Placeholder 1"/>
+          <p:cNvSpPr>
+            <a:spLocks noGrp="1" noRot="1" noChangeAspect="1"/>
+          </p:cNvSpPr>
+          <p:nvPr>
+            <p:ph type="sldImg"/>
+          </p:nvPr>
+        </p:nvSpPr>
+        <p:spPr/>
+      </p:sp>
+      <p:sp>
+        <p:nvSpPr>
+          <p:cNvPr id="3" name="Notes Placeholder 2"/>
+          <p:cNvSpPr>
+            <a:spLocks noGrp="1"/>
+          </p:cNvSpPr>
+          <p:nvPr>
+            <p:ph type="body" idx="1"/>
+          </p:nvPr>
+        </p:nvSpPr>
+        <p:spPr/>
+        <p:txBody>
+          <a:bodyPr/>
+          <a:lstStyle/>
+          <a:p>
+            <a:endParaRPr lang="en-US" dirty="0"/>
+          </a:p>
+        </p:txBody>
+      </p:sp>
+      <p:sp>
+        <p:nvSpPr>
+          <p:cNvPr id="4" name="Slide Number Placeholder 3"/>
+          <p:cNvSpPr>
+            <a:spLocks noGrp="1"/>
+          </p:cNvSpPr>
+          <p:nvPr>
+            <p:ph type="sldNum" sz="quarter" idx="10"/>
+          </p:nvPr>
+        </p:nvSpPr>
+        <p:spPr/>
+        <p:txBody>
+          <a:bodyPr/>
+          <a:lstStyle/>
+          <a:p>
+            <a:fld id="{F7021451-1387-4CA6-816F-3879F97B5CBC}" type="slidenum">
+              <a:rPr lang="en-US"/>
+              <a:t>12</a:t>
+            </a:fld>
+            <a:endParaRPr lang="en-US"/>
+          </a:p>
+        </p:txBody>
+      </p:sp>
+    </p:spTree>
+    <p:extLst>
+      <p:ext uri="{BB962C8B-B14F-4D97-AF65-F5344CB8AC3E}">
+        <p14:creationId xmlns:p14="http://schemas.microsoft.com/office/powerpoint/2010/main" val="1024086991"/>
+      </p:ext>
+    </p:extLst>
+  </p:cSld>
+  <p:clrMapOvr>
+    <a:masterClrMapping/>
+  </p:clrMapOvr>
+</p:notes>
+</file>
+
 <file path=ppt/notesSlides/notesSlide2.xml><?xml version="1.0" encoding="utf-8"?>
 <p:notes xmlns:a="http://schemas.openxmlformats.org/drawingml/2006/main" xmlns:r="http://schemas.openxmlformats.org/officeDocument/2006/relationships" xmlns:p="http://schemas.openxmlformats.org/presentationml/2006/main">
   <p:cSld>
@@ -1113,13 +1283,13 @@
   <p:clrMapOvr>
     <a:masterClrMapping/>
   </p:clrMapOvr>
-  <mc:AlternateContent xmlns:mc="http://schemas.openxmlformats.org/markup-compatibility/2006">
-    <mc:Choice xmlns:p159="http://schemas.microsoft.com/office/powerpoint/2015/09/main" Requires="p159">
+  <mc:AlternateContent xmlns:mc="http://schemas.openxmlformats.org/markup-compatibility/2006" xmlns:p159="http://schemas.microsoft.com/office/powerpoint/2015/09/main">
+    <mc:Choice Requires="p159">
       <p:transition xmlns:p14="http://schemas.microsoft.com/office/powerpoint/2010/main" spd="slow" p14:dur="2000">
         <p159:morph option="byObject"/>
       </p:transition>
     </mc:Choice>
-    <mc:Fallback>
+    <mc:Fallback xmlns="">
       <p:transition spd="slow">
         <p:fade/>
       </p:transition>
@@ -1156,13 +1326,13 @@
   <p:sldLayoutIdLst>
     <p:sldLayoutId id="2147483649" r:id="rId1"/>
   </p:sldLayoutIdLst>
-  <mc:AlternateContent xmlns:mc="http://schemas.openxmlformats.org/markup-compatibility/2006">
-    <mc:Choice xmlns:p159="http://schemas.microsoft.com/office/powerpoint/2015/09/main" Requires="p159">
+  <mc:AlternateContent xmlns:mc="http://schemas.openxmlformats.org/markup-compatibility/2006" xmlns:p159="http://schemas.microsoft.com/office/powerpoint/2015/09/main">
+    <mc:Choice Requires="p159">
       <p:transition xmlns:p14="http://schemas.microsoft.com/office/powerpoint/2010/main" spd="slow" p14:dur="2000">
         <p159:morph option="byObject"/>
       </p:transition>
     </mc:Choice>
-    <mc:Fallback>
+    <mc:Fallback xmlns="">
       <p:transition spd="slow">
         <p:fade/>
       </p:transition>
@@ -1735,13 +1905,13 @@
   <p:clrMapOvr>
     <a:masterClrMapping/>
   </p:clrMapOvr>
-  <mc:AlternateContent xmlns:mc="http://schemas.openxmlformats.org/markup-compatibility/2006">
-    <mc:Choice xmlns:p159="http://schemas.microsoft.com/office/powerpoint/2015/09/main" Requires="p159">
+  <mc:AlternateContent xmlns:mc="http://schemas.openxmlformats.org/markup-compatibility/2006" xmlns:p159="http://schemas.microsoft.com/office/powerpoint/2015/09/main">
+    <mc:Choice Requires="p159">
       <p:transition xmlns:p14="http://schemas.microsoft.com/office/powerpoint/2010/main" spd="slow" p14:dur="2000">
         <p159:morph option="byObject"/>
       </p:transition>
     </mc:Choice>
-    <mc:Fallback>
+    <mc:Fallback xmlns="">
       <p:transition spd="slow">
         <p:fade/>
       </p:transition>
@@ -1802,6 +1972,3703 @@
         </p:nvSpPr>
         <p:spPr>
           <a:xfrm>
+            <a:off x="640080" y="457200"/>
+            <a:ext cx="10911535" cy="320040"/>
+          </a:xfrm>
+          <a:prstGeom prst="rect">
+            <a:avLst/>
+          </a:prstGeom>
+          <a:noFill/>
+          <a:ln/>
+        </p:spPr>
+        <p:txBody>
+          <a:bodyPr wrap="square" lIns="0" tIns="0" rIns="0" bIns="0" rtlCol="0" anchor="ctr"/>
+          <a:lstStyle/>
+          <a:p>
+            <a:pPr marL="0" indent="0" algn="l">
+              <a:buNone/>
+            </a:pPr>
+            <a:r>
+              <a:rPr lang="en-US" sz="1300" b="1" kern="0" spc="300" dirty="0">
+                <a:solidFill>
+                  <a:srgbClr val="D4AF37"/>
+                </a:solidFill>
+                <a:latin typeface="Calibri" pitchFamily="34" charset="0"/>
+                <a:ea typeface="Calibri" pitchFamily="34" charset="-122"/>
+                <a:cs typeface="Calibri" pitchFamily="34" charset="-120"/>
+              </a:rPr>
+              <a:t>ALGORITHM 04</a:t>
+            </a:r>
+            <a:endParaRPr lang="en-US" sz="1300" dirty="0"/>
+          </a:p>
+        </p:txBody>
+      </p:sp>
+      <p:sp>
+        <p:nvSpPr>
+          <p:cNvPr id="4" name="Text 2"/>
+          <p:cNvSpPr/>
+          <p:nvPr/>
+        </p:nvSpPr>
+        <p:spPr>
+          <a:xfrm>
+            <a:off x="640080" y="749808"/>
+            <a:ext cx="10911535" cy="777240"/>
+          </a:xfrm>
+          <a:prstGeom prst="rect">
+            <a:avLst/>
+          </a:prstGeom>
+          <a:noFill/>
+          <a:ln/>
+        </p:spPr>
+        <p:txBody>
+          <a:bodyPr wrap="square" lIns="0" tIns="0" rIns="0" bIns="0" rtlCol="0" anchor="ctr"/>
+          <a:lstStyle/>
+          <a:p>
+            <a:pPr marL="0" indent="0" algn="l">
+              <a:buNone/>
+            </a:pPr>
+            <a:r>
+              <a:rPr lang="en-US" sz="3400" b="1" dirty="0">
+                <a:solidFill>
+                  <a:srgbClr val="FFFFFF"/>
+                </a:solidFill>
+                <a:latin typeface="Cambria" pitchFamily="34" charset="0"/>
+                <a:ea typeface="Cambria" pitchFamily="34" charset="-122"/>
+                <a:cs typeface="Cambria" pitchFamily="34" charset="-120"/>
+              </a:rPr>
+              <a:t>Binary Search — Definition</a:t>
+            </a:r>
+            <a:endParaRPr lang="en-US" sz="3400" dirty="0"/>
+          </a:p>
+        </p:txBody>
+      </p:sp>
+      <p:sp>
+        <p:nvSpPr>
+          <p:cNvPr id="5" name="Text 3"/>
+          <p:cNvSpPr/>
+          <p:nvPr/>
+        </p:nvSpPr>
+        <p:spPr>
+          <a:xfrm>
+            <a:off x="457200" y="6446520"/>
+            <a:ext cx="5486400" cy="274320"/>
+          </a:xfrm>
+          <a:prstGeom prst="rect">
+            <a:avLst/>
+          </a:prstGeom>
+          <a:noFill/>
+          <a:ln/>
+        </p:spPr>
+        <p:txBody>
+          <a:bodyPr wrap="square" lIns="0" tIns="0" rIns="0" bIns="0" rtlCol="0" anchor="ctr"/>
+          <a:lstStyle/>
+          <a:p>
+            <a:pPr marL="0" indent="0" algn="l">
+              <a:buNone/>
+            </a:pPr>
+            <a:r>
+              <a:rPr lang="en-US" sz="1000" dirty="0">
+                <a:solidFill>
+                  <a:srgbClr val="9FB3CF"/>
+                </a:solidFill>
+                <a:latin typeface="Calibri" pitchFamily="34" charset="0"/>
+                <a:ea typeface="Calibri" pitchFamily="34" charset="-122"/>
+                <a:cs typeface="Calibri" pitchFamily="34" charset="-120"/>
+              </a:rPr>
+              <a:t>Sorting Algorithms</a:t>
+            </a:r>
+            <a:endParaRPr lang="en-US" sz="1000" dirty="0"/>
+          </a:p>
+        </p:txBody>
+      </p:sp>
+      <p:sp>
+        <p:nvSpPr>
+          <p:cNvPr id="7" name="Text 5"/>
+          <p:cNvSpPr/>
+          <p:nvPr/>
+        </p:nvSpPr>
+        <p:spPr>
+          <a:xfrm>
+            <a:off x="640080" y="1828800"/>
+            <a:ext cx="6309360" cy="1737360"/>
+          </a:xfrm>
+          <a:prstGeom prst="rect">
+            <a:avLst/>
+          </a:prstGeom>
+          <a:noFill/>
+          <a:ln/>
+        </p:spPr>
+        <p:txBody>
+          <a:bodyPr wrap="square" lIns="0" tIns="0" rIns="0" bIns="0" rtlCol="0" anchor="t"/>
+          <a:lstStyle/>
+          <a:p>
+            <a:pPr marL="0" indent="0" algn="l">
+              <a:lnSpc>
+                <a:spcPct val="128000"/>
+              </a:lnSpc>
+              <a:buNone/>
+            </a:pPr>
+            <a:r>
+              <a:rPr lang="en-US" sz="1650" dirty="0">
+                <a:solidFill>
+                  <a:srgbClr val="FFFFFF"/>
+                </a:solidFill>
+                <a:latin typeface="Calibri" pitchFamily="34" charset="0"/>
+                <a:ea typeface="Calibri" pitchFamily="34" charset="-122"/>
+                <a:cs typeface="Calibri" pitchFamily="34" charset="-120"/>
+              </a:rPr>
+              <a:t>Binary Search (or Dichotomous Search) finds a target value in a sorted array by repeatedly splitting the search range in half, discarding the half that cannot contain the target.</a:t>
+            </a:r>
+            <a:endParaRPr lang="en-US" sz="1650" dirty="0"/>
+          </a:p>
+        </p:txBody>
+      </p:sp>
+      <p:grpSp>
+        <p:nvGrpSpPr>
+          <p:cNvPr id="40" name="Groupe 39">
+            <a:extLst>
+              <a:ext uri="{FF2B5EF4-FFF2-40B4-BE49-F238E27FC236}">
+                <a16:creationId xmlns:a16="http://schemas.microsoft.com/office/drawing/2014/main" id="{5E0AD1FE-7D09-7DA5-24FA-A0DB11DEABFE}"/>
+              </a:ext>
+            </a:extLst>
+          </p:cNvPr>
+          <p:cNvGrpSpPr/>
+          <p:nvPr/>
+        </p:nvGrpSpPr>
+        <p:grpSpPr>
+          <a:xfrm>
+            <a:off x="640080" y="3044952"/>
+            <a:ext cx="6263640" cy="2587752"/>
+            <a:chOff x="640080" y="3657600"/>
+            <a:chExt cx="6263640" cy="2587752"/>
+          </a:xfrm>
+        </p:grpSpPr>
+        <p:sp>
+          <p:nvSpPr>
+            <p:cNvPr id="8" name="Text 6"/>
+            <p:cNvSpPr/>
+            <p:nvPr/>
+          </p:nvSpPr>
+          <p:spPr>
+            <a:xfrm>
+              <a:off x="640080" y="3657600"/>
+              <a:ext cx="4572000" cy="274320"/>
+            </a:xfrm>
+            <a:prstGeom prst="rect">
+              <a:avLst/>
+            </a:prstGeom>
+            <a:noFill/>
+            <a:ln/>
+          </p:spPr>
+          <p:txBody>
+            <a:bodyPr wrap="square" lIns="0" tIns="0" rIns="0" bIns="0" rtlCol="0" anchor="ctr"/>
+            <a:lstStyle/>
+            <a:p>
+              <a:pPr marL="0" indent="0" algn="l">
+                <a:buNone/>
+              </a:pPr>
+              <a:r>
+                <a:rPr lang="en-US" sz="1150" b="1" kern="0" spc="200" dirty="0">
+                  <a:solidFill>
+                    <a:srgbClr val="D4AF37"/>
+                  </a:solidFill>
+                  <a:latin typeface="Calibri" pitchFamily="34" charset="0"/>
+                  <a:ea typeface="Calibri" pitchFamily="34" charset="-122"/>
+                  <a:cs typeface="Calibri" pitchFamily="34" charset="-120"/>
+                </a:rPr>
+                <a:t>HOW IT WORKS</a:t>
+              </a:r>
+              <a:endParaRPr lang="en-US" sz="1150" dirty="0"/>
+            </a:p>
+          </p:txBody>
+        </p:sp>
+        <p:sp>
+          <p:nvSpPr>
+            <p:cNvPr id="9" name="Shape 7"/>
+            <p:cNvSpPr/>
+            <p:nvPr/>
+          </p:nvSpPr>
+          <p:spPr>
+            <a:xfrm>
+              <a:off x="676656" y="3986784"/>
+              <a:ext cx="384048" cy="384048"/>
+            </a:xfrm>
+            <a:prstGeom prst="ellipse">
+              <a:avLst/>
+            </a:prstGeom>
+            <a:solidFill>
+              <a:srgbClr val="132A4E"/>
+            </a:solidFill>
+            <a:ln w="22225">
+              <a:solidFill>
+                <a:srgbClr val="D4AF37"/>
+              </a:solidFill>
+              <a:prstDash val="solid"/>
+            </a:ln>
+          </p:spPr>
+          <p:txBody>
+            <a:bodyPr/>
+            <a:lstStyle/>
+            <a:p>
+              <a:endParaRPr lang="fr-MA"/>
+            </a:p>
+          </p:txBody>
+        </p:sp>
+        <p:sp>
+          <p:nvSpPr>
+            <p:cNvPr id="10" name="Text 8"/>
+            <p:cNvSpPr/>
+            <p:nvPr/>
+          </p:nvSpPr>
+          <p:spPr>
+            <a:xfrm>
+              <a:off x="676656" y="3986784"/>
+              <a:ext cx="384048" cy="384048"/>
+            </a:xfrm>
+            <a:prstGeom prst="rect">
+              <a:avLst/>
+            </a:prstGeom>
+            <a:noFill/>
+            <a:ln/>
+          </p:spPr>
+          <p:txBody>
+            <a:bodyPr wrap="square" lIns="0" tIns="0" rIns="0" bIns="0" rtlCol="0" anchor="ctr"/>
+            <a:lstStyle/>
+            <a:p>
+              <a:pPr marL="0" indent="0" algn="ctr">
+                <a:buNone/>
+              </a:pPr>
+              <a:r>
+                <a:rPr lang="en-US" sz="1300" b="1" dirty="0">
+                  <a:solidFill>
+                    <a:srgbClr val="D4AF37"/>
+                  </a:solidFill>
+                  <a:latin typeface="Cambria" pitchFamily="34" charset="0"/>
+                  <a:ea typeface="Cambria" pitchFamily="34" charset="-122"/>
+                  <a:cs typeface="Cambria" pitchFamily="34" charset="-120"/>
+                </a:rPr>
+                <a:t>1</a:t>
+              </a:r>
+              <a:endParaRPr lang="en-US" sz="1300" dirty="0"/>
+            </a:p>
+          </p:txBody>
+        </p:sp>
+        <p:sp>
+          <p:nvSpPr>
+            <p:cNvPr id="11" name="Text 9"/>
+            <p:cNvSpPr/>
+            <p:nvPr/>
+          </p:nvSpPr>
+          <p:spPr>
+            <a:xfrm>
+              <a:off x="1234440" y="3977640"/>
+              <a:ext cx="5669280" cy="566928"/>
+            </a:xfrm>
+            <a:prstGeom prst="rect">
+              <a:avLst/>
+            </a:prstGeom>
+            <a:noFill/>
+            <a:ln/>
+          </p:spPr>
+          <p:txBody>
+            <a:bodyPr wrap="square" lIns="0" tIns="0" rIns="0" bIns="0" rtlCol="0" anchor="ctr"/>
+            <a:lstStyle/>
+            <a:p>
+              <a:pPr marL="0" indent="0" algn="l">
+                <a:buNone/>
+              </a:pPr>
+              <a:r>
+                <a:rPr lang="en-US" sz="1250" dirty="0">
+                  <a:solidFill>
+                    <a:srgbClr val="9FB3CF"/>
+                  </a:solidFill>
+                  <a:latin typeface="Calibri" pitchFamily="34" charset="0"/>
+                  <a:ea typeface="Calibri" pitchFamily="34" charset="-122"/>
+                  <a:cs typeface="Calibri" pitchFamily="34" charset="-120"/>
+                </a:rPr>
+                <a:t>Start with the full sorted array; set low and high bounds.</a:t>
+              </a:r>
+              <a:endParaRPr lang="en-US" sz="1250" dirty="0"/>
+            </a:p>
+          </p:txBody>
+        </p:sp>
+        <p:sp>
+          <p:nvSpPr>
+            <p:cNvPr id="12" name="Shape 10"/>
+            <p:cNvSpPr/>
+            <p:nvPr/>
+          </p:nvSpPr>
+          <p:spPr>
+            <a:xfrm>
+              <a:off x="676656" y="4553712"/>
+              <a:ext cx="384048" cy="384048"/>
+            </a:xfrm>
+            <a:prstGeom prst="ellipse">
+              <a:avLst/>
+            </a:prstGeom>
+            <a:solidFill>
+              <a:srgbClr val="132A4E"/>
+            </a:solidFill>
+            <a:ln w="22225">
+              <a:solidFill>
+                <a:srgbClr val="D4AF37"/>
+              </a:solidFill>
+              <a:prstDash val="solid"/>
+            </a:ln>
+          </p:spPr>
+          <p:txBody>
+            <a:bodyPr/>
+            <a:lstStyle/>
+            <a:p>
+              <a:endParaRPr lang="fr-MA"/>
+            </a:p>
+          </p:txBody>
+        </p:sp>
+        <p:sp>
+          <p:nvSpPr>
+            <p:cNvPr id="13" name="Text 11"/>
+            <p:cNvSpPr/>
+            <p:nvPr/>
+          </p:nvSpPr>
+          <p:spPr>
+            <a:xfrm>
+              <a:off x="676656" y="4553712"/>
+              <a:ext cx="384048" cy="384048"/>
+            </a:xfrm>
+            <a:prstGeom prst="rect">
+              <a:avLst/>
+            </a:prstGeom>
+            <a:noFill/>
+            <a:ln/>
+          </p:spPr>
+          <p:txBody>
+            <a:bodyPr wrap="square" lIns="0" tIns="0" rIns="0" bIns="0" rtlCol="0" anchor="ctr"/>
+            <a:lstStyle/>
+            <a:p>
+              <a:pPr marL="0" indent="0" algn="ctr">
+                <a:buNone/>
+              </a:pPr>
+              <a:r>
+                <a:rPr lang="en-US" sz="1300" b="1" dirty="0">
+                  <a:solidFill>
+                    <a:srgbClr val="D4AF37"/>
+                  </a:solidFill>
+                  <a:latin typeface="Cambria" pitchFamily="34" charset="0"/>
+                  <a:ea typeface="Cambria" pitchFamily="34" charset="-122"/>
+                  <a:cs typeface="Cambria" pitchFamily="34" charset="-120"/>
+                </a:rPr>
+                <a:t>2</a:t>
+              </a:r>
+              <a:endParaRPr lang="en-US" sz="1300" dirty="0"/>
+            </a:p>
+          </p:txBody>
+        </p:sp>
+        <p:sp>
+          <p:nvSpPr>
+            <p:cNvPr id="14" name="Text 12"/>
+            <p:cNvSpPr/>
+            <p:nvPr/>
+          </p:nvSpPr>
+          <p:spPr>
+            <a:xfrm>
+              <a:off x="1234440" y="4544568"/>
+              <a:ext cx="5669280" cy="566928"/>
+            </a:xfrm>
+            <a:prstGeom prst="rect">
+              <a:avLst/>
+            </a:prstGeom>
+            <a:noFill/>
+            <a:ln/>
+          </p:spPr>
+          <p:txBody>
+            <a:bodyPr wrap="square" lIns="0" tIns="0" rIns="0" bIns="0" rtlCol="0" anchor="ctr"/>
+            <a:lstStyle/>
+            <a:p>
+              <a:pPr marL="0" indent="0" algn="l">
+                <a:buNone/>
+              </a:pPr>
+              <a:r>
+                <a:rPr lang="en-US" sz="1250" dirty="0">
+                  <a:solidFill>
+                    <a:srgbClr val="9FB3CF"/>
+                  </a:solidFill>
+                  <a:latin typeface="Calibri" pitchFamily="34" charset="0"/>
+                  <a:ea typeface="Calibri" pitchFamily="34" charset="-122"/>
+                  <a:cs typeface="Calibri" pitchFamily="34" charset="-120"/>
+                </a:rPr>
+                <a:t>Compare the target to the middle element of the current range.</a:t>
+              </a:r>
+              <a:endParaRPr lang="en-US" sz="1250" dirty="0"/>
+            </a:p>
+          </p:txBody>
+        </p:sp>
+        <p:sp>
+          <p:nvSpPr>
+            <p:cNvPr id="15" name="Shape 13"/>
+            <p:cNvSpPr/>
+            <p:nvPr/>
+          </p:nvSpPr>
+          <p:spPr>
+            <a:xfrm>
+              <a:off x="676656" y="5120640"/>
+              <a:ext cx="384048" cy="384048"/>
+            </a:xfrm>
+            <a:prstGeom prst="ellipse">
+              <a:avLst/>
+            </a:prstGeom>
+            <a:solidFill>
+              <a:srgbClr val="132A4E"/>
+            </a:solidFill>
+            <a:ln w="22225">
+              <a:solidFill>
+                <a:srgbClr val="D4AF37"/>
+              </a:solidFill>
+              <a:prstDash val="solid"/>
+            </a:ln>
+          </p:spPr>
+          <p:txBody>
+            <a:bodyPr/>
+            <a:lstStyle/>
+            <a:p>
+              <a:endParaRPr lang="fr-MA"/>
+            </a:p>
+          </p:txBody>
+        </p:sp>
+        <p:sp>
+          <p:nvSpPr>
+            <p:cNvPr id="16" name="Text 14"/>
+            <p:cNvSpPr/>
+            <p:nvPr/>
+          </p:nvSpPr>
+          <p:spPr>
+            <a:xfrm>
+              <a:off x="676656" y="5120640"/>
+              <a:ext cx="384048" cy="384048"/>
+            </a:xfrm>
+            <a:prstGeom prst="rect">
+              <a:avLst/>
+            </a:prstGeom>
+            <a:noFill/>
+            <a:ln/>
+          </p:spPr>
+          <p:txBody>
+            <a:bodyPr wrap="square" lIns="0" tIns="0" rIns="0" bIns="0" rtlCol="0" anchor="ctr"/>
+            <a:lstStyle/>
+            <a:p>
+              <a:pPr marL="0" indent="0" algn="ctr">
+                <a:buNone/>
+              </a:pPr>
+              <a:r>
+                <a:rPr lang="en-US" sz="1300" b="1" dirty="0">
+                  <a:solidFill>
+                    <a:srgbClr val="D4AF37"/>
+                  </a:solidFill>
+                  <a:latin typeface="Cambria" pitchFamily="34" charset="0"/>
+                  <a:ea typeface="Cambria" pitchFamily="34" charset="-122"/>
+                  <a:cs typeface="Cambria" pitchFamily="34" charset="-120"/>
+                </a:rPr>
+                <a:t>3</a:t>
+              </a:r>
+              <a:endParaRPr lang="en-US" sz="1300" dirty="0"/>
+            </a:p>
+          </p:txBody>
+        </p:sp>
+        <p:sp>
+          <p:nvSpPr>
+            <p:cNvPr id="17" name="Text 15"/>
+            <p:cNvSpPr/>
+            <p:nvPr/>
+          </p:nvSpPr>
+          <p:spPr>
+            <a:xfrm>
+              <a:off x="1234440" y="5111496"/>
+              <a:ext cx="5669280" cy="566928"/>
+            </a:xfrm>
+            <a:prstGeom prst="rect">
+              <a:avLst/>
+            </a:prstGeom>
+            <a:noFill/>
+            <a:ln/>
+          </p:spPr>
+          <p:txBody>
+            <a:bodyPr wrap="square" lIns="0" tIns="0" rIns="0" bIns="0" rtlCol="0" anchor="ctr"/>
+            <a:lstStyle/>
+            <a:p>
+              <a:pPr marL="0" indent="0" algn="l">
+                <a:buNone/>
+              </a:pPr>
+              <a:r>
+                <a:rPr lang="en-US" sz="1250" dirty="0">
+                  <a:solidFill>
+                    <a:srgbClr val="9FB3CF"/>
+                  </a:solidFill>
+                  <a:latin typeface="Calibri" pitchFamily="34" charset="0"/>
+                  <a:ea typeface="Calibri" pitchFamily="34" charset="-122"/>
+                  <a:cs typeface="Calibri" pitchFamily="34" charset="-120"/>
+                </a:rPr>
+                <a:t>If it matches, the search is done — otherwise keep the half that could contain it.</a:t>
+              </a:r>
+              <a:endParaRPr lang="en-US" sz="1250" dirty="0"/>
+            </a:p>
+          </p:txBody>
+        </p:sp>
+        <p:sp>
+          <p:nvSpPr>
+            <p:cNvPr id="18" name="Shape 16"/>
+            <p:cNvSpPr/>
+            <p:nvPr/>
+          </p:nvSpPr>
+          <p:spPr>
+            <a:xfrm>
+              <a:off x="676656" y="5687568"/>
+              <a:ext cx="384048" cy="384048"/>
+            </a:xfrm>
+            <a:prstGeom prst="ellipse">
+              <a:avLst/>
+            </a:prstGeom>
+            <a:solidFill>
+              <a:srgbClr val="132A4E"/>
+            </a:solidFill>
+            <a:ln w="22225">
+              <a:solidFill>
+                <a:srgbClr val="D4AF37"/>
+              </a:solidFill>
+              <a:prstDash val="solid"/>
+            </a:ln>
+          </p:spPr>
+          <p:txBody>
+            <a:bodyPr/>
+            <a:lstStyle/>
+            <a:p>
+              <a:endParaRPr lang="fr-MA"/>
+            </a:p>
+          </p:txBody>
+        </p:sp>
+        <p:sp>
+          <p:nvSpPr>
+            <p:cNvPr id="19" name="Text 17"/>
+            <p:cNvSpPr/>
+            <p:nvPr/>
+          </p:nvSpPr>
+          <p:spPr>
+            <a:xfrm>
+              <a:off x="676656" y="5687568"/>
+              <a:ext cx="384048" cy="384048"/>
+            </a:xfrm>
+            <a:prstGeom prst="rect">
+              <a:avLst/>
+            </a:prstGeom>
+            <a:noFill/>
+            <a:ln/>
+          </p:spPr>
+          <p:txBody>
+            <a:bodyPr wrap="square" lIns="0" tIns="0" rIns="0" bIns="0" rtlCol="0" anchor="ctr"/>
+            <a:lstStyle/>
+            <a:p>
+              <a:pPr marL="0" indent="0" algn="ctr">
+                <a:buNone/>
+              </a:pPr>
+              <a:r>
+                <a:rPr lang="en-US" sz="1300" b="1" dirty="0">
+                  <a:solidFill>
+                    <a:srgbClr val="D4AF37"/>
+                  </a:solidFill>
+                  <a:latin typeface="Cambria" pitchFamily="34" charset="0"/>
+                  <a:ea typeface="Cambria" pitchFamily="34" charset="-122"/>
+                  <a:cs typeface="Cambria" pitchFamily="34" charset="-120"/>
+                </a:rPr>
+                <a:t>4</a:t>
+              </a:r>
+              <a:endParaRPr lang="en-US" sz="1300" dirty="0"/>
+            </a:p>
+          </p:txBody>
+        </p:sp>
+        <p:sp>
+          <p:nvSpPr>
+            <p:cNvPr id="20" name="Text 18"/>
+            <p:cNvSpPr/>
+            <p:nvPr/>
+          </p:nvSpPr>
+          <p:spPr>
+            <a:xfrm>
+              <a:off x="1234440" y="5678424"/>
+              <a:ext cx="5669280" cy="566928"/>
+            </a:xfrm>
+            <a:prstGeom prst="rect">
+              <a:avLst/>
+            </a:prstGeom>
+            <a:noFill/>
+            <a:ln/>
+          </p:spPr>
+          <p:txBody>
+            <a:bodyPr wrap="square" lIns="0" tIns="0" rIns="0" bIns="0" rtlCol="0" anchor="ctr"/>
+            <a:lstStyle/>
+            <a:p>
+              <a:pPr marL="0" indent="0" algn="l">
+                <a:buNone/>
+              </a:pPr>
+              <a:r>
+                <a:rPr lang="en-US" sz="1250" dirty="0">
+                  <a:solidFill>
+                    <a:srgbClr val="9FB3CF"/>
+                  </a:solidFill>
+                  <a:latin typeface="Calibri" pitchFamily="34" charset="0"/>
+                  <a:ea typeface="Calibri" pitchFamily="34" charset="-122"/>
+                  <a:cs typeface="Calibri" pitchFamily="34" charset="-120"/>
+                </a:rPr>
+                <a:t>Repeat on the smaller range until the target is found or the range is empty.</a:t>
+              </a:r>
+              <a:endParaRPr lang="en-US" sz="1250" dirty="0"/>
+            </a:p>
+          </p:txBody>
+        </p:sp>
+      </p:grpSp>
+      <p:sp>
+        <p:nvSpPr>
+          <p:cNvPr id="41" name="Rectangle 40">
+            <a:extLst>
+              <a:ext uri="{FF2B5EF4-FFF2-40B4-BE49-F238E27FC236}">
+                <a16:creationId xmlns:a16="http://schemas.microsoft.com/office/drawing/2014/main" id="{A161B8C9-A6BF-E964-9274-AD00A6CFB167}"/>
+              </a:ext>
+            </a:extLst>
+          </p:cNvPr>
+          <p:cNvSpPr/>
+          <p:nvPr/>
+        </p:nvSpPr>
+        <p:spPr>
+          <a:xfrm>
+            <a:off x="6949439" y="0"/>
+            <a:ext cx="5242255" cy="6858000"/>
+          </a:xfrm>
+          <a:prstGeom prst="rect">
+            <a:avLst/>
+          </a:prstGeom>
+          <a:blipFill dpi="0" rotWithShape="1">
+            <a:blip r:embed="rId3">
+              <a:extLst>
+                <a:ext uri="{28A0092B-C50C-407E-A947-70E740481C1C}">
+                  <a14:useLocalDpi xmlns:a14="http://schemas.microsoft.com/office/drawing/2010/main" val="0"/>
+                </a:ext>
+              </a:extLst>
+            </a:blip>
+            <a:srcRect/>
+            <a:stretch>
+              <a:fillRect/>
+            </a:stretch>
+          </a:blipFill>
+          <a:ln>
+            <a:noFill/>
+          </a:ln>
+        </p:spPr>
+        <p:style>
+          <a:lnRef idx="2">
+            <a:schemeClr val="accent1">
+              <a:shade val="15000"/>
+            </a:schemeClr>
+          </a:lnRef>
+          <a:fillRef idx="1">
+            <a:schemeClr val="accent1"/>
+          </a:fillRef>
+          <a:effectRef idx="0">
+            <a:schemeClr val="accent1"/>
+          </a:effectRef>
+          <a:fontRef idx="minor">
+            <a:schemeClr val="lt1"/>
+          </a:fontRef>
+        </p:style>
+        <p:txBody>
+          <a:bodyPr rtlCol="0" anchor="ctr"/>
+          <a:lstStyle/>
+          <a:p>
+            <a:pPr algn="ctr"/>
+            <a:endParaRPr lang="fr-MA"/>
+          </a:p>
+        </p:txBody>
+      </p:sp>
+      <p:sp>
+        <p:nvSpPr>
+          <p:cNvPr id="6" name="Text 4"/>
+          <p:cNvSpPr/>
+          <p:nvPr/>
+        </p:nvSpPr>
+        <p:spPr>
+          <a:xfrm>
+            <a:off x="11277295" y="6446520"/>
+            <a:ext cx="457200" cy="274320"/>
+          </a:xfrm>
+          <a:prstGeom prst="rect">
+            <a:avLst/>
+          </a:prstGeom>
+          <a:noFill/>
+          <a:ln/>
+        </p:spPr>
+        <p:txBody>
+          <a:bodyPr wrap="square" lIns="0" tIns="0" rIns="0" bIns="0" rtlCol="0" anchor="ctr"/>
+          <a:lstStyle/>
+          <a:p>
+            <a:pPr marL="0" indent="0" algn="r">
+              <a:buNone/>
+            </a:pPr>
+            <a:r>
+              <a:rPr lang="en-US" sz="1000" dirty="0">
+                <a:solidFill>
+                  <a:srgbClr val="9FB3CF"/>
+                </a:solidFill>
+                <a:latin typeface="Calibri" pitchFamily="34" charset="0"/>
+                <a:ea typeface="Calibri" pitchFamily="34" charset="-122"/>
+                <a:cs typeface="Calibri" pitchFamily="34" charset="-120"/>
+              </a:rPr>
+              <a:t>10</a:t>
+            </a:r>
+            <a:endParaRPr lang="en-US" sz="1000" dirty="0"/>
+          </a:p>
+        </p:txBody>
+      </p:sp>
+    </p:spTree>
+  </p:cSld>
+  <p:clrMapOvr>
+    <a:masterClrMapping/>
+  </p:clrMapOvr>
+  <mc:AlternateContent xmlns:mc="http://schemas.openxmlformats.org/markup-compatibility/2006" xmlns:p159="http://schemas.microsoft.com/office/powerpoint/2015/09/main">
+    <mc:Choice Requires="p159">
+      <p:transition xmlns:p14="http://schemas.microsoft.com/office/powerpoint/2010/main" spd="slow" p14:dur="2000">
+        <p159:morph option="byObject"/>
+      </p:transition>
+    </mc:Choice>
+    <mc:Fallback xmlns="">
+      <p:transition spd="slow">
+        <p:fade/>
+      </p:transition>
+    </mc:Fallback>
+  </mc:AlternateContent>
+</p:sld>
+</file>
+
+<file path=ppt/slides/slide11.xml><?xml version="1.0" encoding="utf-8"?>
+<p:sld xmlns:a="http://schemas.openxmlformats.org/drawingml/2006/main" xmlns:r="http://schemas.openxmlformats.org/officeDocument/2006/relationships" xmlns:p="http://schemas.openxmlformats.org/presentationml/2006/main">
+  <p:cSld>
+    <p:spTree>
+      <p:nvGrpSpPr>
+        <p:cNvPr id="1" name=""/>
+        <p:cNvGrpSpPr/>
+        <p:nvPr/>
+      </p:nvGrpSpPr>
+      <p:grpSpPr>
+        <a:xfrm>
+          <a:off x="0" y="0"/>
+          <a:ext cx="0" cy="0"/>
+          <a:chOff x="0" y="0"/>
+          <a:chExt cx="0" cy="0"/>
+        </a:xfrm>
+      </p:grpSpPr>
+      <p:sp>
+        <p:nvSpPr>
+          <p:cNvPr id="2" name="Shape 0"/>
+          <p:cNvSpPr/>
+          <p:nvPr/>
+        </p:nvSpPr>
+        <p:spPr>
+          <a:xfrm>
+            <a:off x="0" y="0"/>
+            <a:ext cx="12191695" cy="6858000"/>
+          </a:xfrm>
+          <a:prstGeom prst="rect">
+            <a:avLst/>
+          </a:prstGeom>
+          <a:solidFill>
+            <a:srgbClr val="0A1930"/>
+          </a:solidFill>
+          <a:ln/>
+        </p:spPr>
+        <p:txBody>
+          <a:bodyPr/>
+          <a:lstStyle/>
+          <a:p>
+            <a:endParaRPr lang="fr-MA"/>
+          </a:p>
+        </p:txBody>
+      </p:sp>
+      <p:sp>
+        <p:nvSpPr>
+          <p:cNvPr id="3" name="Text 1"/>
+          <p:cNvSpPr/>
+          <p:nvPr/>
+        </p:nvSpPr>
+        <p:spPr>
+          <a:xfrm>
+            <a:off x="640080" y="457200"/>
+            <a:ext cx="10911535" cy="320040"/>
+          </a:xfrm>
+          <a:prstGeom prst="rect">
+            <a:avLst/>
+          </a:prstGeom>
+          <a:noFill/>
+          <a:ln/>
+        </p:spPr>
+        <p:txBody>
+          <a:bodyPr wrap="square" lIns="0" tIns="0" rIns="0" bIns="0" rtlCol="0" anchor="ctr"/>
+          <a:lstStyle/>
+          <a:p>
+            <a:pPr marL="0" indent="0" algn="l">
+              <a:buNone/>
+            </a:pPr>
+            <a:r>
+              <a:rPr lang="en-US" sz="1300" b="1" kern="0" spc="300" dirty="0">
+                <a:solidFill>
+                  <a:srgbClr val="D4AF37"/>
+                </a:solidFill>
+                <a:latin typeface="Calibri" pitchFamily="34" charset="0"/>
+                <a:ea typeface="Calibri" pitchFamily="34" charset="-122"/>
+                <a:cs typeface="Calibri" pitchFamily="34" charset="-120"/>
+              </a:rPr>
+              <a:t>ALGORITHM 04 — IN ACTION</a:t>
+            </a:r>
+            <a:endParaRPr lang="en-US" sz="1300" dirty="0"/>
+          </a:p>
+        </p:txBody>
+      </p:sp>
+      <p:sp>
+        <p:nvSpPr>
+          <p:cNvPr id="4" name="Text 2"/>
+          <p:cNvSpPr/>
+          <p:nvPr/>
+        </p:nvSpPr>
+        <p:spPr>
+          <a:xfrm>
+            <a:off x="640080" y="749808"/>
+            <a:ext cx="10911535" cy="777240"/>
+          </a:xfrm>
+          <a:prstGeom prst="rect">
+            <a:avLst/>
+          </a:prstGeom>
+          <a:noFill/>
+          <a:ln/>
+        </p:spPr>
+        <p:txBody>
+          <a:bodyPr wrap="square" lIns="0" tIns="0" rIns="0" bIns="0" rtlCol="0" anchor="ctr"/>
+          <a:lstStyle/>
+          <a:p>
+            <a:pPr marL="0" indent="0" algn="l">
+              <a:buNone/>
+            </a:pPr>
+            <a:r>
+              <a:rPr lang="en-US" sz="3400" b="1" dirty="0">
+                <a:solidFill>
+                  <a:srgbClr val="FFFFFF"/>
+                </a:solidFill>
+                <a:latin typeface="Cambria" pitchFamily="34" charset="0"/>
+                <a:ea typeface="Cambria" pitchFamily="34" charset="-122"/>
+                <a:cs typeface="Cambria" pitchFamily="34" charset="-120"/>
+              </a:rPr>
+              <a:t>Visualizing Binary Search</a:t>
+            </a:r>
+            <a:endParaRPr lang="en-US" sz="3400" dirty="0"/>
+          </a:p>
+        </p:txBody>
+      </p:sp>
+      <p:sp>
+        <p:nvSpPr>
+          <p:cNvPr id="5" name="Text 3"/>
+          <p:cNvSpPr/>
+          <p:nvPr/>
+        </p:nvSpPr>
+        <p:spPr>
+          <a:xfrm>
+            <a:off x="457200" y="6446520"/>
+            <a:ext cx="5486400" cy="274320"/>
+          </a:xfrm>
+          <a:prstGeom prst="rect">
+            <a:avLst/>
+          </a:prstGeom>
+          <a:noFill/>
+          <a:ln/>
+        </p:spPr>
+        <p:txBody>
+          <a:bodyPr wrap="square" lIns="0" tIns="0" rIns="0" bIns="0" rtlCol="0" anchor="ctr"/>
+          <a:lstStyle/>
+          <a:p>
+            <a:pPr marL="0" indent="0" algn="l">
+              <a:buNone/>
+            </a:pPr>
+            <a:r>
+              <a:rPr lang="en-US" sz="1000" dirty="0">
+                <a:solidFill>
+                  <a:srgbClr val="9FB3CF"/>
+                </a:solidFill>
+                <a:latin typeface="Calibri" pitchFamily="34" charset="0"/>
+                <a:ea typeface="Calibri" pitchFamily="34" charset="-122"/>
+                <a:cs typeface="Calibri" pitchFamily="34" charset="-120"/>
+              </a:rPr>
+              <a:t>Sorting Algorithms</a:t>
+            </a:r>
+            <a:endParaRPr lang="en-US" sz="1000" dirty="0"/>
+          </a:p>
+        </p:txBody>
+      </p:sp>
+      <p:sp>
+        <p:nvSpPr>
+          <p:cNvPr id="6" name="Text 4"/>
+          <p:cNvSpPr/>
+          <p:nvPr/>
+        </p:nvSpPr>
+        <p:spPr>
+          <a:xfrm>
+            <a:off x="11277295" y="6446520"/>
+            <a:ext cx="457200" cy="274320"/>
+          </a:xfrm>
+          <a:prstGeom prst="rect">
+            <a:avLst/>
+          </a:prstGeom>
+          <a:noFill/>
+          <a:ln/>
+        </p:spPr>
+        <p:txBody>
+          <a:bodyPr wrap="square" lIns="0" tIns="0" rIns="0" bIns="0" rtlCol="0" anchor="ctr"/>
+          <a:lstStyle/>
+          <a:p>
+            <a:pPr marL="0" indent="0" algn="r">
+              <a:buNone/>
+            </a:pPr>
+            <a:r>
+              <a:rPr lang="en-US" sz="1000" dirty="0">
+                <a:solidFill>
+                  <a:srgbClr val="9FB3CF"/>
+                </a:solidFill>
+                <a:latin typeface="Calibri" pitchFamily="34" charset="0"/>
+                <a:ea typeface="Calibri" pitchFamily="34" charset="-122"/>
+                <a:cs typeface="Calibri" pitchFamily="34" charset="-120"/>
+              </a:rPr>
+              <a:t>11</a:t>
+            </a:r>
+            <a:endParaRPr lang="en-US" sz="1000" dirty="0"/>
+          </a:p>
+        </p:txBody>
+      </p:sp>
+      <p:sp>
+        <p:nvSpPr>
+          <p:cNvPr id="7" name="Text 5"/>
+          <p:cNvSpPr/>
+          <p:nvPr/>
+        </p:nvSpPr>
+        <p:spPr>
+          <a:xfrm>
+            <a:off x="640080" y="1783080"/>
+            <a:ext cx="1828800" cy="340157"/>
+          </a:xfrm>
+          <a:prstGeom prst="rect">
+            <a:avLst/>
+          </a:prstGeom>
+          <a:noFill/>
+          <a:ln/>
+        </p:spPr>
+        <p:txBody>
+          <a:bodyPr wrap="square" lIns="0" tIns="0" rIns="0" bIns="0" rtlCol="0" anchor="b"/>
+          <a:lstStyle/>
+          <a:p>
+            <a:pPr marL="0" indent="0" algn="l">
+              <a:buNone/>
+            </a:pPr>
+            <a:r>
+              <a:rPr lang="en-US" sz="1500" b="1" dirty="0">
+                <a:solidFill>
+                  <a:srgbClr val="FFFFFF"/>
+                </a:solidFill>
+                <a:latin typeface="Calibri" pitchFamily="34" charset="0"/>
+                <a:ea typeface="Calibri" pitchFamily="34" charset="-122"/>
+                <a:cs typeface="Calibri" pitchFamily="34" charset="-120"/>
+              </a:rPr>
+              <a:t>Step 1</a:t>
+            </a:r>
+            <a:endParaRPr lang="en-US" sz="1500" dirty="0"/>
+          </a:p>
+        </p:txBody>
+      </p:sp>
+      <p:sp>
+        <p:nvSpPr>
+          <p:cNvPr id="8" name="Text 6"/>
+          <p:cNvSpPr/>
+          <p:nvPr/>
+        </p:nvSpPr>
+        <p:spPr>
+          <a:xfrm>
+            <a:off x="640080" y="2094890"/>
+            <a:ext cx="2103120" cy="226771"/>
+          </a:xfrm>
+          <a:prstGeom prst="rect">
+            <a:avLst/>
+          </a:prstGeom>
+          <a:noFill/>
+          <a:ln/>
+        </p:spPr>
+        <p:txBody>
+          <a:bodyPr wrap="square" lIns="0" tIns="0" rIns="0" bIns="0" rtlCol="0" anchor="t"/>
+          <a:lstStyle/>
+          <a:p>
+            <a:pPr marL="0" indent="0" algn="l">
+              <a:buNone/>
+            </a:pPr>
+            <a:r>
+              <a:rPr lang="en-US" sz="1050" dirty="0">
+                <a:solidFill>
+                  <a:srgbClr val="9FB3CF"/>
+                </a:solidFill>
+                <a:latin typeface="Calibri" pitchFamily="34" charset="0"/>
+                <a:ea typeface="Calibri" pitchFamily="34" charset="-122"/>
+                <a:cs typeface="Calibri" pitchFamily="34" charset="-120"/>
+              </a:rPr>
+              <a:t>compare with 9</a:t>
+            </a:r>
+            <a:endParaRPr lang="en-US" sz="1050" dirty="0"/>
+          </a:p>
+        </p:txBody>
+      </p:sp>
+      <p:sp>
+        <p:nvSpPr>
+          <p:cNvPr id="9" name="Shape 7"/>
+          <p:cNvSpPr/>
+          <p:nvPr/>
+        </p:nvSpPr>
+        <p:spPr>
+          <a:xfrm>
+            <a:off x="2743200" y="1783080"/>
+            <a:ext cx="566928" cy="566928"/>
+          </a:xfrm>
+          <a:prstGeom prst="roundRect">
+            <a:avLst>
+              <a:gd name="adj" fmla="val 12903"/>
+            </a:avLst>
+          </a:prstGeom>
+          <a:solidFill>
+            <a:srgbClr val="132A4E"/>
+          </a:solidFill>
+          <a:ln w="15875">
+            <a:solidFill>
+              <a:srgbClr val="24406E"/>
+            </a:solidFill>
+            <a:prstDash val="solid"/>
+          </a:ln>
+        </p:spPr>
+        <p:txBody>
+          <a:bodyPr/>
+          <a:lstStyle/>
+          <a:p>
+            <a:endParaRPr lang="fr-MA"/>
+          </a:p>
+        </p:txBody>
+      </p:sp>
+      <p:sp>
+        <p:nvSpPr>
+          <p:cNvPr id="10" name="Text 8"/>
+          <p:cNvSpPr/>
+          <p:nvPr/>
+        </p:nvSpPr>
+        <p:spPr>
+          <a:xfrm>
+            <a:off x="2743200" y="1783080"/>
+            <a:ext cx="566928" cy="566928"/>
+          </a:xfrm>
+          <a:prstGeom prst="rect">
+            <a:avLst/>
+          </a:prstGeom>
+          <a:noFill/>
+          <a:ln/>
+        </p:spPr>
+        <p:txBody>
+          <a:bodyPr wrap="square" lIns="0" tIns="0" rIns="0" bIns="0" rtlCol="0" anchor="ctr"/>
+          <a:lstStyle/>
+          <a:p>
+            <a:pPr marL="0" indent="0" algn="ctr">
+              <a:buNone/>
+            </a:pPr>
+            <a:r>
+              <a:rPr lang="en-US" sz="1600" b="1" dirty="0">
+                <a:solidFill>
+                  <a:srgbClr val="FFFFFF"/>
+                </a:solidFill>
+                <a:latin typeface="Calibri" pitchFamily="34" charset="0"/>
+                <a:ea typeface="Calibri" pitchFamily="34" charset="-122"/>
+                <a:cs typeface="Calibri" pitchFamily="34" charset="-120"/>
+              </a:rPr>
+              <a:t>1</a:t>
+            </a:r>
+            <a:endParaRPr lang="en-US" sz="1600" dirty="0"/>
+          </a:p>
+        </p:txBody>
+      </p:sp>
+      <p:sp>
+        <p:nvSpPr>
+          <p:cNvPr id="11" name="Shape 9"/>
+          <p:cNvSpPr/>
+          <p:nvPr/>
+        </p:nvSpPr>
+        <p:spPr>
+          <a:xfrm>
+            <a:off x="3438144" y="1783080"/>
+            <a:ext cx="566928" cy="566928"/>
+          </a:xfrm>
+          <a:prstGeom prst="roundRect">
+            <a:avLst>
+              <a:gd name="adj" fmla="val 12903"/>
+            </a:avLst>
+          </a:prstGeom>
+          <a:solidFill>
+            <a:srgbClr val="132A4E"/>
+          </a:solidFill>
+          <a:ln w="15875">
+            <a:solidFill>
+              <a:srgbClr val="24406E"/>
+            </a:solidFill>
+            <a:prstDash val="solid"/>
+          </a:ln>
+        </p:spPr>
+        <p:txBody>
+          <a:bodyPr/>
+          <a:lstStyle/>
+          <a:p>
+            <a:endParaRPr lang="fr-MA"/>
+          </a:p>
+        </p:txBody>
+      </p:sp>
+      <p:sp>
+        <p:nvSpPr>
+          <p:cNvPr id="12" name="Text 10"/>
+          <p:cNvSpPr/>
+          <p:nvPr/>
+        </p:nvSpPr>
+        <p:spPr>
+          <a:xfrm>
+            <a:off x="3438144" y="1783080"/>
+            <a:ext cx="566928" cy="566928"/>
+          </a:xfrm>
+          <a:prstGeom prst="rect">
+            <a:avLst/>
+          </a:prstGeom>
+          <a:noFill/>
+          <a:ln/>
+        </p:spPr>
+        <p:txBody>
+          <a:bodyPr wrap="square" lIns="0" tIns="0" rIns="0" bIns="0" rtlCol="0" anchor="ctr"/>
+          <a:lstStyle/>
+          <a:p>
+            <a:pPr marL="0" indent="0" algn="ctr">
+              <a:buNone/>
+            </a:pPr>
+            <a:r>
+              <a:rPr lang="en-US" sz="1600" b="1" dirty="0">
+                <a:solidFill>
+                  <a:srgbClr val="FFFFFF"/>
+                </a:solidFill>
+                <a:latin typeface="Calibri" pitchFamily="34" charset="0"/>
+                <a:ea typeface="Calibri" pitchFamily="34" charset="-122"/>
+                <a:cs typeface="Calibri" pitchFamily="34" charset="-120"/>
+              </a:rPr>
+              <a:t>3</a:t>
+            </a:r>
+            <a:endParaRPr lang="en-US" sz="1600" dirty="0"/>
+          </a:p>
+        </p:txBody>
+      </p:sp>
+      <p:sp>
+        <p:nvSpPr>
+          <p:cNvPr id="13" name="Shape 11"/>
+          <p:cNvSpPr/>
+          <p:nvPr/>
+        </p:nvSpPr>
+        <p:spPr>
+          <a:xfrm>
+            <a:off x="4133088" y="1783080"/>
+            <a:ext cx="566928" cy="566928"/>
+          </a:xfrm>
+          <a:prstGeom prst="roundRect">
+            <a:avLst>
+              <a:gd name="adj" fmla="val 12903"/>
+            </a:avLst>
+          </a:prstGeom>
+          <a:solidFill>
+            <a:srgbClr val="132A4E"/>
+          </a:solidFill>
+          <a:ln w="15875">
+            <a:solidFill>
+              <a:srgbClr val="24406E"/>
+            </a:solidFill>
+            <a:prstDash val="solid"/>
+          </a:ln>
+        </p:spPr>
+        <p:txBody>
+          <a:bodyPr/>
+          <a:lstStyle/>
+          <a:p>
+            <a:endParaRPr lang="fr-MA"/>
+          </a:p>
+        </p:txBody>
+      </p:sp>
+      <p:sp>
+        <p:nvSpPr>
+          <p:cNvPr id="14" name="Text 12"/>
+          <p:cNvSpPr/>
+          <p:nvPr/>
+        </p:nvSpPr>
+        <p:spPr>
+          <a:xfrm>
+            <a:off x="4133088" y="1783080"/>
+            <a:ext cx="566928" cy="566928"/>
+          </a:xfrm>
+          <a:prstGeom prst="rect">
+            <a:avLst/>
+          </a:prstGeom>
+          <a:noFill/>
+          <a:ln/>
+        </p:spPr>
+        <p:txBody>
+          <a:bodyPr wrap="square" lIns="0" tIns="0" rIns="0" bIns="0" rtlCol="0" anchor="ctr"/>
+          <a:lstStyle/>
+          <a:p>
+            <a:pPr marL="0" indent="0" algn="ctr">
+              <a:buNone/>
+            </a:pPr>
+            <a:r>
+              <a:rPr lang="en-US" sz="1600" b="1" dirty="0">
+                <a:solidFill>
+                  <a:srgbClr val="FFFFFF"/>
+                </a:solidFill>
+                <a:latin typeface="Calibri" pitchFamily="34" charset="0"/>
+                <a:ea typeface="Calibri" pitchFamily="34" charset="-122"/>
+                <a:cs typeface="Calibri" pitchFamily="34" charset="-120"/>
+              </a:rPr>
+              <a:t>5</a:t>
+            </a:r>
+            <a:endParaRPr lang="en-US" sz="1600" dirty="0"/>
+          </a:p>
+        </p:txBody>
+      </p:sp>
+      <p:sp>
+        <p:nvSpPr>
+          <p:cNvPr id="15" name="Shape 13"/>
+          <p:cNvSpPr/>
+          <p:nvPr/>
+        </p:nvSpPr>
+        <p:spPr>
+          <a:xfrm>
+            <a:off x="4828032" y="1783080"/>
+            <a:ext cx="566928" cy="566928"/>
+          </a:xfrm>
+          <a:prstGeom prst="roundRect">
+            <a:avLst>
+              <a:gd name="adj" fmla="val 12903"/>
+            </a:avLst>
+          </a:prstGeom>
+          <a:solidFill>
+            <a:srgbClr val="132A4E"/>
+          </a:solidFill>
+          <a:ln w="15875">
+            <a:solidFill>
+              <a:srgbClr val="24406E"/>
+            </a:solidFill>
+            <a:prstDash val="solid"/>
+          </a:ln>
+        </p:spPr>
+        <p:txBody>
+          <a:bodyPr/>
+          <a:lstStyle/>
+          <a:p>
+            <a:endParaRPr lang="fr-MA"/>
+          </a:p>
+        </p:txBody>
+      </p:sp>
+      <p:sp>
+        <p:nvSpPr>
+          <p:cNvPr id="16" name="Text 14"/>
+          <p:cNvSpPr/>
+          <p:nvPr/>
+        </p:nvSpPr>
+        <p:spPr>
+          <a:xfrm>
+            <a:off x="4828032" y="1783080"/>
+            <a:ext cx="566928" cy="566928"/>
+          </a:xfrm>
+          <a:prstGeom prst="rect">
+            <a:avLst/>
+          </a:prstGeom>
+          <a:noFill/>
+          <a:ln/>
+        </p:spPr>
+        <p:txBody>
+          <a:bodyPr wrap="square" lIns="0" tIns="0" rIns="0" bIns="0" rtlCol="0" anchor="ctr"/>
+          <a:lstStyle/>
+          <a:p>
+            <a:pPr marL="0" indent="0" algn="ctr">
+              <a:buNone/>
+            </a:pPr>
+            <a:r>
+              <a:rPr lang="en-US" sz="1600" b="1" dirty="0">
+                <a:solidFill>
+                  <a:srgbClr val="FFFFFF"/>
+                </a:solidFill>
+                <a:latin typeface="Calibri" pitchFamily="34" charset="0"/>
+                <a:ea typeface="Calibri" pitchFamily="34" charset="-122"/>
+                <a:cs typeface="Calibri" pitchFamily="34" charset="-120"/>
+              </a:rPr>
+              <a:t>7</a:t>
+            </a:r>
+            <a:endParaRPr lang="en-US" sz="1600" dirty="0"/>
+          </a:p>
+        </p:txBody>
+      </p:sp>
+      <p:sp>
+        <p:nvSpPr>
+          <p:cNvPr id="17" name="Shape 15"/>
+          <p:cNvSpPr/>
+          <p:nvPr/>
+        </p:nvSpPr>
+        <p:spPr>
+          <a:xfrm>
+            <a:off x="5522976" y="1783080"/>
+            <a:ext cx="566928" cy="566928"/>
+          </a:xfrm>
+          <a:prstGeom prst="roundRect">
+            <a:avLst>
+              <a:gd name="adj" fmla="val 12903"/>
+            </a:avLst>
+          </a:prstGeom>
+          <a:solidFill>
+            <a:srgbClr val="132A4E"/>
+          </a:solidFill>
+          <a:ln w="28575">
+            <a:solidFill>
+              <a:srgbClr val="D4AF37"/>
+            </a:solidFill>
+            <a:prstDash val="solid"/>
+          </a:ln>
+        </p:spPr>
+        <p:txBody>
+          <a:bodyPr/>
+          <a:lstStyle/>
+          <a:p>
+            <a:endParaRPr lang="fr-MA"/>
+          </a:p>
+        </p:txBody>
+      </p:sp>
+      <p:sp>
+        <p:nvSpPr>
+          <p:cNvPr id="18" name="Text 16"/>
+          <p:cNvSpPr/>
+          <p:nvPr/>
+        </p:nvSpPr>
+        <p:spPr>
+          <a:xfrm>
+            <a:off x="5522976" y="1783080"/>
+            <a:ext cx="566928" cy="566928"/>
+          </a:xfrm>
+          <a:prstGeom prst="rect">
+            <a:avLst/>
+          </a:prstGeom>
+          <a:noFill/>
+          <a:ln/>
+        </p:spPr>
+        <p:txBody>
+          <a:bodyPr wrap="square" lIns="0" tIns="0" rIns="0" bIns="0" rtlCol="0" anchor="ctr"/>
+          <a:lstStyle/>
+          <a:p>
+            <a:pPr marL="0" indent="0" algn="ctr">
+              <a:buNone/>
+            </a:pPr>
+            <a:r>
+              <a:rPr lang="en-US" sz="1600" b="1" dirty="0">
+                <a:solidFill>
+                  <a:srgbClr val="E9CE72"/>
+                </a:solidFill>
+                <a:latin typeface="Calibri" pitchFamily="34" charset="0"/>
+                <a:ea typeface="Calibri" pitchFamily="34" charset="-122"/>
+                <a:cs typeface="Calibri" pitchFamily="34" charset="-120"/>
+              </a:rPr>
+              <a:t>9</a:t>
+            </a:r>
+            <a:endParaRPr lang="en-US" sz="1600" dirty="0"/>
+          </a:p>
+        </p:txBody>
+      </p:sp>
+      <p:sp>
+        <p:nvSpPr>
+          <p:cNvPr id="19" name="Shape 17"/>
+          <p:cNvSpPr/>
+          <p:nvPr/>
+        </p:nvSpPr>
+        <p:spPr>
+          <a:xfrm>
+            <a:off x="6217920" y="1783080"/>
+            <a:ext cx="566928" cy="566928"/>
+          </a:xfrm>
+          <a:prstGeom prst="roundRect">
+            <a:avLst>
+              <a:gd name="adj" fmla="val 12903"/>
+            </a:avLst>
+          </a:prstGeom>
+          <a:solidFill>
+            <a:srgbClr val="132A4E"/>
+          </a:solidFill>
+          <a:ln w="15875">
+            <a:solidFill>
+              <a:srgbClr val="24406E"/>
+            </a:solidFill>
+            <a:prstDash val="solid"/>
+          </a:ln>
+        </p:spPr>
+        <p:txBody>
+          <a:bodyPr/>
+          <a:lstStyle/>
+          <a:p>
+            <a:endParaRPr lang="fr-MA"/>
+          </a:p>
+        </p:txBody>
+      </p:sp>
+      <p:sp>
+        <p:nvSpPr>
+          <p:cNvPr id="20" name="Text 18"/>
+          <p:cNvSpPr/>
+          <p:nvPr/>
+        </p:nvSpPr>
+        <p:spPr>
+          <a:xfrm>
+            <a:off x="6217920" y="1783080"/>
+            <a:ext cx="566928" cy="566928"/>
+          </a:xfrm>
+          <a:prstGeom prst="rect">
+            <a:avLst/>
+          </a:prstGeom>
+          <a:noFill/>
+          <a:ln/>
+        </p:spPr>
+        <p:txBody>
+          <a:bodyPr wrap="square" lIns="0" tIns="0" rIns="0" bIns="0" rtlCol="0" anchor="ctr"/>
+          <a:lstStyle/>
+          <a:p>
+            <a:pPr marL="0" indent="0" algn="ctr">
+              <a:buNone/>
+            </a:pPr>
+            <a:r>
+              <a:rPr lang="en-US" sz="1600" b="1" dirty="0">
+                <a:solidFill>
+                  <a:srgbClr val="FFFFFF"/>
+                </a:solidFill>
+                <a:latin typeface="Calibri" pitchFamily="34" charset="0"/>
+                <a:ea typeface="Calibri" pitchFamily="34" charset="-122"/>
+                <a:cs typeface="Calibri" pitchFamily="34" charset="-120"/>
+              </a:rPr>
+              <a:t>11</a:t>
+            </a:r>
+            <a:endParaRPr lang="en-US" sz="1600" dirty="0"/>
+          </a:p>
+        </p:txBody>
+      </p:sp>
+      <p:sp>
+        <p:nvSpPr>
+          <p:cNvPr id="21" name="Shape 19"/>
+          <p:cNvSpPr/>
+          <p:nvPr/>
+        </p:nvSpPr>
+        <p:spPr>
+          <a:xfrm>
+            <a:off x="6912864" y="1783080"/>
+            <a:ext cx="566928" cy="566928"/>
+          </a:xfrm>
+          <a:prstGeom prst="roundRect">
+            <a:avLst>
+              <a:gd name="adj" fmla="val 12903"/>
+            </a:avLst>
+          </a:prstGeom>
+          <a:solidFill>
+            <a:srgbClr val="132A4E"/>
+          </a:solidFill>
+          <a:ln w="15875">
+            <a:solidFill>
+              <a:srgbClr val="24406E"/>
+            </a:solidFill>
+            <a:prstDash val="solid"/>
+          </a:ln>
+        </p:spPr>
+        <p:txBody>
+          <a:bodyPr/>
+          <a:lstStyle/>
+          <a:p>
+            <a:endParaRPr lang="fr-MA"/>
+          </a:p>
+        </p:txBody>
+      </p:sp>
+      <p:sp>
+        <p:nvSpPr>
+          <p:cNvPr id="22" name="Text 20"/>
+          <p:cNvSpPr/>
+          <p:nvPr/>
+        </p:nvSpPr>
+        <p:spPr>
+          <a:xfrm>
+            <a:off x="6912864" y="1783080"/>
+            <a:ext cx="566928" cy="566928"/>
+          </a:xfrm>
+          <a:prstGeom prst="rect">
+            <a:avLst/>
+          </a:prstGeom>
+          <a:noFill/>
+          <a:ln/>
+        </p:spPr>
+        <p:txBody>
+          <a:bodyPr wrap="square" lIns="0" tIns="0" rIns="0" bIns="0" rtlCol="0" anchor="ctr"/>
+          <a:lstStyle/>
+          <a:p>
+            <a:pPr marL="0" indent="0" algn="ctr">
+              <a:buNone/>
+            </a:pPr>
+            <a:r>
+              <a:rPr lang="en-US" sz="1600" b="1" dirty="0">
+                <a:solidFill>
+                  <a:srgbClr val="FFFFFF"/>
+                </a:solidFill>
+                <a:latin typeface="Calibri" pitchFamily="34" charset="0"/>
+                <a:ea typeface="Calibri" pitchFamily="34" charset="-122"/>
+                <a:cs typeface="Calibri" pitchFamily="34" charset="-120"/>
+              </a:rPr>
+              <a:t>13</a:t>
+            </a:r>
+            <a:endParaRPr lang="en-US" sz="1600" dirty="0"/>
+          </a:p>
+        </p:txBody>
+      </p:sp>
+      <p:sp>
+        <p:nvSpPr>
+          <p:cNvPr id="23" name="Shape 21"/>
+          <p:cNvSpPr/>
+          <p:nvPr/>
+        </p:nvSpPr>
+        <p:spPr>
+          <a:xfrm>
+            <a:off x="7607808" y="1783080"/>
+            <a:ext cx="566928" cy="566928"/>
+          </a:xfrm>
+          <a:prstGeom prst="roundRect">
+            <a:avLst>
+              <a:gd name="adj" fmla="val 12903"/>
+            </a:avLst>
+          </a:prstGeom>
+          <a:solidFill>
+            <a:srgbClr val="132A4E"/>
+          </a:solidFill>
+          <a:ln w="15875">
+            <a:solidFill>
+              <a:srgbClr val="24406E"/>
+            </a:solidFill>
+            <a:prstDash val="solid"/>
+          </a:ln>
+        </p:spPr>
+        <p:txBody>
+          <a:bodyPr/>
+          <a:lstStyle/>
+          <a:p>
+            <a:endParaRPr lang="fr-MA"/>
+          </a:p>
+        </p:txBody>
+      </p:sp>
+      <p:sp>
+        <p:nvSpPr>
+          <p:cNvPr id="24" name="Text 22"/>
+          <p:cNvSpPr/>
+          <p:nvPr/>
+        </p:nvSpPr>
+        <p:spPr>
+          <a:xfrm>
+            <a:off x="7607808" y="1783080"/>
+            <a:ext cx="566928" cy="566928"/>
+          </a:xfrm>
+          <a:prstGeom prst="rect">
+            <a:avLst/>
+          </a:prstGeom>
+          <a:noFill/>
+          <a:ln/>
+        </p:spPr>
+        <p:txBody>
+          <a:bodyPr wrap="square" lIns="0" tIns="0" rIns="0" bIns="0" rtlCol="0" anchor="ctr"/>
+          <a:lstStyle/>
+          <a:p>
+            <a:pPr marL="0" indent="0" algn="ctr">
+              <a:buNone/>
+            </a:pPr>
+            <a:r>
+              <a:rPr lang="en-US" sz="1600" b="1" dirty="0">
+                <a:solidFill>
+                  <a:srgbClr val="FFFFFF"/>
+                </a:solidFill>
+                <a:latin typeface="Calibri" pitchFamily="34" charset="0"/>
+                <a:ea typeface="Calibri" pitchFamily="34" charset="-122"/>
+                <a:cs typeface="Calibri" pitchFamily="34" charset="-120"/>
+              </a:rPr>
+              <a:t>15</a:t>
+            </a:r>
+            <a:endParaRPr lang="en-US" sz="1600" dirty="0"/>
+          </a:p>
+        </p:txBody>
+      </p:sp>
+      <p:sp>
+        <p:nvSpPr>
+          <p:cNvPr id="25" name="Shape 23"/>
+          <p:cNvSpPr/>
+          <p:nvPr/>
+        </p:nvSpPr>
+        <p:spPr>
+          <a:xfrm>
+            <a:off x="8302752" y="1783080"/>
+            <a:ext cx="566928" cy="566928"/>
+          </a:xfrm>
+          <a:prstGeom prst="roundRect">
+            <a:avLst>
+              <a:gd name="adj" fmla="val 12903"/>
+            </a:avLst>
+          </a:prstGeom>
+          <a:solidFill>
+            <a:srgbClr val="132A4E"/>
+          </a:solidFill>
+          <a:ln w="15875">
+            <a:solidFill>
+              <a:srgbClr val="24406E"/>
+            </a:solidFill>
+            <a:prstDash val="solid"/>
+          </a:ln>
+        </p:spPr>
+        <p:txBody>
+          <a:bodyPr/>
+          <a:lstStyle/>
+          <a:p>
+            <a:endParaRPr lang="fr-MA"/>
+          </a:p>
+        </p:txBody>
+      </p:sp>
+      <p:sp>
+        <p:nvSpPr>
+          <p:cNvPr id="26" name="Text 24"/>
+          <p:cNvSpPr/>
+          <p:nvPr/>
+        </p:nvSpPr>
+        <p:spPr>
+          <a:xfrm>
+            <a:off x="8302752" y="1783080"/>
+            <a:ext cx="566928" cy="566928"/>
+          </a:xfrm>
+          <a:prstGeom prst="rect">
+            <a:avLst/>
+          </a:prstGeom>
+          <a:noFill/>
+          <a:ln/>
+        </p:spPr>
+        <p:txBody>
+          <a:bodyPr wrap="square" lIns="0" tIns="0" rIns="0" bIns="0" rtlCol="0" anchor="ctr"/>
+          <a:lstStyle/>
+          <a:p>
+            <a:pPr marL="0" indent="0" algn="ctr">
+              <a:buNone/>
+            </a:pPr>
+            <a:r>
+              <a:rPr lang="en-US" sz="1600" b="1" dirty="0">
+                <a:solidFill>
+                  <a:srgbClr val="FFFFFF"/>
+                </a:solidFill>
+                <a:latin typeface="Calibri" pitchFamily="34" charset="0"/>
+                <a:ea typeface="Calibri" pitchFamily="34" charset="-122"/>
+                <a:cs typeface="Calibri" pitchFamily="34" charset="-120"/>
+              </a:rPr>
+              <a:t>17</a:t>
+            </a:r>
+            <a:endParaRPr lang="en-US" sz="1600" dirty="0"/>
+          </a:p>
+        </p:txBody>
+      </p:sp>
+      <p:sp>
+        <p:nvSpPr>
+          <p:cNvPr id="27" name="Text 25"/>
+          <p:cNvSpPr/>
+          <p:nvPr/>
+        </p:nvSpPr>
+        <p:spPr>
+          <a:xfrm>
+            <a:off x="9189720" y="1783080"/>
+            <a:ext cx="2743200" cy="566928"/>
+          </a:xfrm>
+          <a:prstGeom prst="rect">
+            <a:avLst/>
+          </a:prstGeom>
+          <a:noFill/>
+          <a:ln/>
+        </p:spPr>
+        <p:txBody>
+          <a:bodyPr wrap="square" lIns="0" tIns="0" rIns="0" bIns="0" rtlCol="0" anchor="ctr"/>
+          <a:lstStyle/>
+          <a:p>
+            <a:pPr marL="0" indent="0" algn="l">
+              <a:buNone/>
+            </a:pPr>
+            <a:r>
+              <a:rPr lang="en-US" sz="1250" i="1" dirty="0">
+                <a:solidFill>
+                  <a:srgbClr val="9FB3CF"/>
+                </a:solidFill>
+                <a:latin typeface="Calibri" pitchFamily="34" charset="0"/>
+                <a:ea typeface="Calibri" pitchFamily="34" charset="-122"/>
+                <a:cs typeface="Calibri" pitchFamily="34" charset="-120"/>
+              </a:rPr>
+              <a:t>15 &gt; 9 → search right half</a:t>
+            </a:r>
+            <a:endParaRPr lang="en-US" sz="1250" dirty="0"/>
+          </a:p>
+        </p:txBody>
+      </p:sp>
+      <p:sp>
+        <p:nvSpPr>
+          <p:cNvPr id="28" name="Text 26"/>
+          <p:cNvSpPr/>
+          <p:nvPr/>
+        </p:nvSpPr>
+        <p:spPr>
+          <a:xfrm>
+            <a:off x="640080" y="2834640"/>
+            <a:ext cx="1828800" cy="340157"/>
+          </a:xfrm>
+          <a:prstGeom prst="rect">
+            <a:avLst/>
+          </a:prstGeom>
+          <a:noFill/>
+          <a:ln/>
+        </p:spPr>
+        <p:txBody>
+          <a:bodyPr wrap="square" lIns="0" tIns="0" rIns="0" bIns="0" rtlCol="0" anchor="b"/>
+          <a:lstStyle/>
+          <a:p>
+            <a:pPr marL="0" indent="0" algn="l">
+              <a:buNone/>
+            </a:pPr>
+            <a:r>
+              <a:rPr lang="en-US" sz="1500" b="1" dirty="0">
+                <a:solidFill>
+                  <a:srgbClr val="FFFFFF"/>
+                </a:solidFill>
+                <a:latin typeface="Calibri" pitchFamily="34" charset="0"/>
+                <a:ea typeface="Calibri" pitchFamily="34" charset="-122"/>
+                <a:cs typeface="Calibri" pitchFamily="34" charset="-120"/>
+              </a:rPr>
+              <a:t>Step 2</a:t>
+            </a:r>
+            <a:endParaRPr lang="en-US" sz="1500" dirty="0"/>
+          </a:p>
+        </p:txBody>
+      </p:sp>
+      <p:sp>
+        <p:nvSpPr>
+          <p:cNvPr id="29" name="Text 27"/>
+          <p:cNvSpPr/>
+          <p:nvPr/>
+        </p:nvSpPr>
+        <p:spPr>
+          <a:xfrm>
+            <a:off x="640080" y="3146450"/>
+            <a:ext cx="2103120" cy="226771"/>
+          </a:xfrm>
+          <a:prstGeom prst="rect">
+            <a:avLst/>
+          </a:prstGeom>
+          <a:noFill/>
+          <a:ln/>
+        </p:spPr>
+        <p:txBody>
+          <a:bodyPr wrap="square" lIns="0" tIns="0" rIns="0" bIns="0" rtlCol="0" anchor="t"/>
+          <a:lstStyle/>
+          <a:p>
+            <a:pPr marL="0" indent="0" algn="l">
+              <a:buNone/>
+            </a:pPr>
+            <a:r>
+              <a:rPr lang="en-US" sz="1050" dirty="0">
+                <a:solidFill>
+                  <a:srgbClr val="9FB3CF"/>
+                </a:solidFill>
+                <a:latin typeface="Calibri" pitchFamily="34" charset="0"/>
+                <a:ea typeface="Calibri" pitchFamily="34" charset="-122"/>
+                <a:cs typeface="Calibri" pitchFamily="34" charset="-120"/>
+              </a:rPr>
+              <a:t>compare with 13</a:t>
+            </a:r>
+            <a:endParaRPr lang="en-US" sz="1050" dirty="0"/>
+          </a:p>
+        </p:txBody>
+      </p:sp>
+      <p:sp>
+        <p:nvSpPr>
+          <p:cNvPr id="30" name="Shape 28"/>
+          <p:cNvSpPr/>
+          <p:nvPr/>
+        </p:nvSpPr>
+        <p:spPr>
+          <a:xfrm>
+            <a:off x="2743200" y="2834640"/>
+            <a:ext cx="566928" cy="566928"/>
+          </a:xfrm>
+          <a:prstGeom prst="roundRect">
+            <a:avLst>
+              <a:gd name="adj" fmla="val 12903"/>
+            </a:avLst>
+          </a:prstGeom>
+          <a:solidFill>
+            <a:srgbClr val="0A1930"/>
+          </a:solidFill>
+          <a:ln w="15875">
+            <a:solidFill>
+              <a:srgbClr val="1B2C4A"/>
+            </a:solidFill>
+            <a:prstDash val="solid"/>
+          </a:ln>
+        </p:spPr>
+        <p:txBody>
+          <a:bodyPr/>
+          <a:lstStyle/>
+          <a:p>
+            <a:endParaRPr lang="fr-MA"/>
+          </a:p>
+        </p:txBody>
+      </p:sp>
+      <p:sp>
+        <p:nvSpPr>
+          <p:cNvPr id="31" name="Text 29"/>
+          <p:cNvSpPr/>
+          <p:nvPr/>
+        </p:nvSpPr>
+        <p:spPr>
+          <a:xfrm>
+            <a:off x="2743200" y="2834640"/>
+            <a:ext cx="566928" cy="566928"/>
+          </a:xfrm>
+          <a:prstGeom prst="rect">
+            <a:avLst/>
+          </a:prstGeom>
+          <a:noFill/>
+          <a:ln/>
+        </p:spPr>
+        <p:txBody>
+          <a:bodyPr wrap="square" lIns="0" tIns="0" rIns="0" bIns="0" rtlCol="0" anchor="ctr"/>
+          <a:lstStyle/>
+          <a:p>
+            <a:pPr marL="0" indent="0" algn="ctr">
+              <a:buNone/>
+            </a:pPr>
+            <a:r>
+              <a:rPr lang="en-US" sz="1600" b="1" dirty="0">
+                <a:solidFill>
+                  <a:srgbClr val="3E5273"/>
+                </a:solidFill>
+                <a:latin typeface="Calibri" pitchFamily="34" charset="0"/>
+                <a:ea typeface="Calibri" pitchFamily="34" charset="-122"/>
+                <a:cs typeface="Calibri" pitchFamily="34" charset="-120"/>
+              </a:rPr>
+              <a:t>1</a:t>
+            </a:r>
+            <a:endParaRPr lang="en-US" sz="1600" dirty="0"/>
+          </a:p>
+        </p:txBody>
+      </p:sp>
+      <p:sp>
+        <p:nvSpPr>
+          <p:cNvPr id="32" name="Shape 30"/>
+          <p:cNvSpPr/>
+          <p:nvPr/>
+        </p:nvSpPr>
+        <p:spPr>
+          <a:xfrm>
+            <a:off x="3438144" y="2834640"/>
+            <a:ext cx="566928" cy="566928"/>
+          </a:xfrm>
+          <a:prstGeom prst="roundRect">
+            <a:avLst>
+              <a:gd name="adj" fmla="val 12903"/>
+            </a:avLst>
+          </a:prstGeom>
+          <a:solidFill>
+            <a:srgbClr val="0A1930"/>
+          </a:solidFill>
+          <a:ln w="15875">
+            <a:solidFill>
+              <a:srgbClr val="1B2C4A"/>
+            </a:solidFill>
+            <a:prstDash val="solid"/>
+          </a:ln>
+        </p:spPr>
+        <p:txBody>
+          <a:bodyPr/>
+          <a:lstStyle/>
+          <a:p>
+            <a:endParaRPr lang="fr-MA"/>
+          </a:p>
+        </p:txBody>
+      </p:sp>
+      <p:sp>
+        <p:nvSpPr>
+          <p:cNvPr id="33" name="Text 31"/>
+          <p:cNvSpPr/>
+          <p:nvPr/>
+        </p:nvSpPr>
+        <p:spPr>
+          <a:xfrm>
+            <a:off x="3438144" y="2834640"/>
+            <a:ext cx="566928" cy="566928"/>
+          </a:xfrm>
+          <a:prstGeom prst="rect">
+            <a:avLst/>
+          </a:prstGeom>
+          <a:noFill/>
+          <a:ln/>
+        </p:spPr>
+        <p:txBody>
+          <a:bodyPr wrap="square" lIns="0" tIns="0" rIns="0" bIns="0" rtlCol="0" anchor="ctr"/>
+          <a:lstStyle/>
+          <a:p>
+            <a:pPr marL="0" indent="0" algn="ctr">
+              <a:buNone/>
+            </a:pPr>
+            <a:r>
+              <a:rPr lang="en-US" sz="1600" b="1" dirty="0">
+                <a:solidFill>
+                  <a:srgbClr val="3E5273"/>
+                </a:solidFill>
+                <a:latin typeface="Calibri" pitchFamily="34" charset="0"/>
+                <a:ea typeface="Calibri" pitchFamily="34" charset="-122"/>
+                <a:cs typeface="Calibri" pitchFamily="34" charset="-120"/>
+              </a:rPr>
+              <a:t>3</a:t>
+            </a:r>
+            <a:endParaRPr lang="en-US" sz="1600" dirty="0"/>
+          </a:p>
+        </p:txBody>
+      </p:sp>
+      <p:sp>
+        <p:nvSpPr>
+          <p:cNvPr id="34" name="Shape 32"/>
+          <p:cNvSpPr/>
+          <p:nvPr/>
+        </p:nvSpPr>
+        <p:spPr>
+          <a:xfrm>
+            <a:off x="4133088" y="2834640"/>
+            <a:ext cx="566928" cy="566928"/>
+          </a:xfrm>
+          <a:prstGeom prst="roundRect">
+            <a:avLst>
+              <a:gd name="adj" fmla="val 12903"/>
+            </a:avLst>
+          </a:prstGeom>
+          <a:solidFill>
+            <a:srgbClr val="0A1930"/>
+          </a:solidFill>
+          <a:ln w="15875">
+            <a:solidFill>
+              <a:srgbClr val="1B2C4A"/>
+            </a:solidFill>
+            <a:prstDash val="solid"/>
+          </a:ln>
+        </p:spPr>
+        <p:txBody>
+          <a:bodyPr/>
+          <a:lstStyle/>
+          <a:p>
+            <a:endParaRPr lang="fr-MA"/>
+          </a:p>
+        </p:txBody>
+      </p:sp>
+      <p:sp>
+        <p:nvSpPr>
+          <p:cNvPr id="35" name="Text 33"/>
+          <p:cNvSpPr/>
+          <p:nvPr/>
+        </p:nvSpPr>
+        <p:spPr>
+          <a:xfrm>
+            <a:off x="4133088" y="2834640"/>
+            <a:ext cx="566928" cy="566928"/>
+          </a:xfrm>
+          <a:prstGeom prst="rect">
+            <a:avLst/>
+          </a:prstGeom>
+          <a:noFill/>
+          <a:ln/>
+        </p:spPr>
+        <p:txBody>
+          <a:bodyPr wrap="square" lIns="0" tIns="0" rIns="0" bIns="0" rtlCol="0" anchor="ctr"/>
+          <a:lstStyle/>
+          <a:p>
+            <a:pPr marL="0" indent="0" algn="ctr">
+              <a:buNone/>
+            </a:pPr>
+            <a:r>
+              <a:rPr lang="en-US" sz="1600" b="1" dirty="0">
+                <a:solidFill>
+                  <a:srgbClr val="3E5273"/>
+                </a:solidFill>
+                <a:latin typeface="Calibri" pitchFamily="34" charset="0"/>
+                <a:ea typeface="Calibri" pitchFamily="34" charset="-122"/>
+                <a:cs typeface="Calibri" pitchFamily="34" charset="-120"/>
+              </a:rPr>
+              <a:t>5</a:t>
+            </a:r>
+            <a:endParaRPr lang="en-US" sz="1600" dirty="0"/>
+          </a:p>
+        </p:txBody>
+      </p:sp>
+      <p:sp>
+        <p:nvSpPr>
+          <p:cNvPr id="36" name="Shape 34"/>
+          <p:cNvSpPr/>
+          <p:nvPr/>
+        </p:nvSpPr>
+        <p:spPr>
+          <a:xfrm>
+            <a:off x="4828032" y="2834640"/>
+            <a:ext cx="566928" cy="566928"/>
+          </a:xfrm>
+          <a:prstGeom prst="roundRect">
+            <a:avLst>
+              <a:gd name="adj" fmla="val 12903"/>
+            </a:avLst>
+          </a:prstGeom>
+          <a:solidFill>
+            <a:srgbClr val="0A1930"/>
+          </a:solidFill>
+          <a:ln w="15875">
+            <a:solidFill>
+              <a:srgbClr val="1B2C4A"/>
+            </a:solidFill>
+            <a:prstDash val="solid"/>
+          </a:ln>
+        </p:spPr>
+        <p:txBody>
+          <a:bodyPr/>
+          <a:lstStyle/>
+          <a:p>
+            <a:endParaRPr lang="fr-MA"/>
+          </a:p>
+        </p:txBody>
+      </p:sp>
+      <p:sp>
+        <p:nvSpPr>
+          <p:cNvPr id="37" name="Text 35"/>
+          <p:cNvSpPr/>
+          <p:nvPr/>
+        </p:nvSpPr>
+        <p:spPr>
+          <a:xfrm>
+            <a:off x="4828032" y="2834640"/>
+            <a:ext cx="566928" cy="566928"/>
+          </a:xfrm>
+          <a:prstGeom prst="rect">
+            <a:avLst/>
+          </a:prstGeom>
+          <a:noFill/>
+          <a:ln/>
+        </p:spPr>
+        <p:txBody>
+          <a:bodyPr wrap="square" lIns="0" tIns="0" rIns="0" bIns="0" rtlCol="0" anchor="ctr"/>
+          <a:lstStyle/>
+          <a:p>
+            <a:pPr marL="0" indent="0" algn="ctr">
+              <a:buNone/>
+            </a:pPr>
+            <a:r>
+              <a:rPr lang="en-US" sz="1600" b="1" dirty="0">
+                <a:solidFill>
+                  <a:srgbClr val="3E5273"/>
+                </a:solidFill>
+                <a:latin typeface="Calibri" pitchFamily="34" charset="0"/>
+                <a:ea typeface="Calibri" pitchFamily="34" charset="-122"/>
+                <a:cs typeface="Calibri" pitchFamily="34" charset="-120"/>
+              </a:rPr>
+              <a:t>7</a:t>
+            </a:r>
+            <a:endParaRPr lang="en-US" sz="1600" dirty="0"/>
+          </a:p>
+        </p:txBody>
+      </p:sp>
+      <p:sp>
+        <p:nvSpPr>
+          <p:cNvPr id="38" name="Shape 36"/>
+          <p:cNvSpPr/>
+          <p:nvPr/>
+        </p:nvSpPr>
+        <p:spPr>
+          <a:xfrm>
+            <a:off x="5522976" y="2834640"/>
+            <a:ext cx="566928" cy="566928"/>
+          </a:xfrm>
+          <a:prstGeom prst="roundRect">
+            <a:avLst>
+              <a:gd name="adj" fmla="val 12903"/>
+            </a:avLst>
+          </a:prstGeom>
+          <a:solidFill>
+            <a:srgbClr val="0A1930"/>
+          </a:solidFill>
+          <a:ln w="15875">
+            <a:solidFill>
+              <a:srgbClr val="1B2C4A"/>
+            </a:solidFill>
+            <a:prstDash val="solid"/>
+          </a:ln>
+        </p:spPr>
+        <p:txBody>
+          <a:bodyPr/>
+          <a:lstStyle/>
+          <a:p>
+            <a:endParaRPr lang="fr-MA"/>
+          </a:p>
+        </p:txBody>
+      </p:sp>
+      <p:sp>
+        <p:nvSpPr>
+          <p:cNvPr id="39" name="Text 37"/>
+          <p:cNvSpPr/>
+          <p:nvPr/>
+        </p:nvSpPr>
+        <p:spPr>
+          <a:xfrm>
+            <a:off x="5522976" y="2834640"/>
+            <a:ext cx="566928" cy="566928"/>
+          </a:xfrm>
+          <a:prstGeom prst="rect">
+            <a:avLst/>
+          </a:prstGeom>
+          <a:noFill/>
+          <a:ln/>
+        </p:spPr>
+        <p:txBody>
+          <a:bodyPr wrap="square" lIns="0" tIns="0" rIns="0" bIns="0" rtlCol="0" anchor="ctr"/>
+          <a:lstStyle/>
+          <a:p>
+            <a:pPr marL="0" indent="0" algn="ctr">
+              <a:buNone/>
+            </a:pPr>
+            <a:r>
+              <a:rPr lang="en-US" sz="1600" b="1" dirty="0">
+                <a:solidFill>
+                  <a:srgbClr val="3E5273"/>
+                </a:solidFill>
+                <a:latin typeface="Calibri" pitchFamily="34" charset="0"/>
+                <a:ea typeface="Calibri" pitchFamily="34" charset="-122"/>
+                <a:cs typeface="Calibri" pitchFamily="34" charset="-120"/>
+              </a:rPr>
+              <a:t>9</a:t>
+            </a:r>
+            <a:endParaRPr lang="en-US" sz="1600" dirty="0"/>
+          </a:p>
+        </p:txBody>
+      </p:sp>
+      <p:sp>
+        <p:nvSpPr>
+          <p:cNvPr id="40" name="Shape 38"/>
+          <p:cNvSpPr/>
+          <p:nvPr/>
+        </p:nvSpPr>
+        <p:spPr>
+          <a:xfrm>
+            <a:off x="6217920" y="2834640"/>
+            <a:ext cx="566928" cy="566928"/>
+          </a:xfrm>
+          <a:prstGeom prst="roundRect">
+            <a:avLst>
+              <a:gd name="adj" fmla="val 12903"/>
+            </a:avLst>
+          </a:prstGeom>
+          <a:solidFill>
+            <a:srgbClr val="132A4E"/>
+          </a:solidFill>
+          <a:ln w="15875">
+            <a:solidFill>
+              <a:srgbClr val="24406E"/>
+            </a:solidFill>
+            <a:prstDash val="solid"/>
+          </a:ln>
+        </p:spPr>
+        <p:txBody>
+          <a:bodyPr/>
+          <a:lstStyle/>
+          <a:p>
+            <a:endParaRPr lang="fr-MA"/>
+          </a:p>
+        </p:txBody>
+      </p:sp>
+      <p:sp>
+        <p:nvSpPr>
+          <p:cNvPr id="41" name="Text 39"/>
+          <p:cNvSpPr/>
+          <p:nvPr/>
+        </p:nvSpPr>
+        <p:spPr>
+          <a:xfrm>
+            <a:off x="6217920" y="2834640"/>
+            <a:ext cx="566928" cy="566928"/>
+          </a:xfrm>
+          <a:prstGeom prst="rect">
+            <a:avLst/>
+          </a:prstGeom>
+          <a:noFill/>
+          <a:ln/>
+        </p:spPr>
+        <p:txBody>
+          <a:bodyPr wrap="square" lIns="0" tIns="0" rIns="0" bIns="0" rtlCol="0" anchor="ctr"/>
+          <a:lstStyle/>
+          <a:p>
+            <a:pPr marL="0" indent="0" algn="ctr">
+              <a:buNone/>
+            </a:pPr>
+            <a:r>
+              <a:rPr lang="en-US" sz="1600" b="1" dirty="0">
+                <a:solidFill>
+                  <a:srgbClr val="FFFFFF"/>
+                </a:solidFill>
+                <a:latin typeface="Calibri" pitchFamily="34" charset="0"/>
+                <a:ea typeface="Calibri" pitchFamily="34" charset="-122"/>
+                <a:cs typeface="Calibri" pitchFamily="34" charset="-120"/>
+              </a:rPr>
+              <a:t>11</a:t>
+            </a:r>
+            <a:endParaRPr lang="en-US" sz="1600" dirty="0"/>
+          </a:p>
+        </p:txBody>
+      </p:sp>
+      <p:sp>
+        <p:nvSpPr>
+          <p:cNvPr id="42" name="Shape 40"/>
+          <p:cNvSpPr/>
+          <p:nvPr/>
+        </p:nvSpPr>
+        <p:spPr>
+          <a:xfrm>
+            <a:off x="6912864" y="2834640"/>
+            <a:ext cx="566928" cy="566928"/>
+          </a:xfrm>
+          <a:prstGeom prst="roundRect">
+            <a:avLst>
+              <a:gd name="adj" fmla="val 12903"/>
+            </a:avLst>
+          </a:prstGeom>
+          <a:solidFill>
+            <a:srgbClr val="132A4E"/>
+          </a:solidFill>
+          <a:ln w="28575">
+            <a:solidFill>
+              <a:srgbClr val="D4AF37"/>
+            </a:solidFill>
+            <a:prstDash val="solid"/>
+          </a:ln>
+        </p:spPr>
+        <p:txBody>
+          <a:bodyPr/>
+          <a:lstStyle/>
+          <a:p>
+            <a:endParaRPr lang="fr-MA"/>
+          </a:p>
+        </p:txBody>
+      </p:sp>
+      <p:sp>
+        <p:nvSpPr>
+          <p:cNvPr id="43" name="Text 41"/>
+          <p:cNvSpPr/>
+          <p:nvPr/>
+        </p:nvSpPr>
+        <p:spPr>
+          <a:xfrm>
+            <a:off x="6912864" y="2834640"/>
+            <a:ext cx="566928" cy="566928"/>
+          </a:xfrm>
+          <a:prstGeom prst="rect">
+            <a:avLst/>
+          </a:prstGeom>
+          <a:noFill/>
+          <a:ln/>
+        </p:spPr>
+        <p:txBody>
+          <a:bodyPr wrap="square" lIns="0" tIns="0" rIns="0" bIns="0" rtlCol="0" anchor="ctr"/>
+          <a:lstStyle/>
+          <a:p>
+            <a:pPr marL="0" indent="0" algn="ctr">
+              <a:buNone/>
+            </a:pPr>
+            <a:r>
+              <a:rPr lang="en-US" sz="1600" b="1" dirty="0">
+                <a:solidFill>
+                  <a:srgbClr val="E9CE72"/>
+                </a:solidFill>
+                <a:latin typeface="Calibri" pitchFamily="34" charset="0"/>
+                <a:ea typeface="Calibri" pitchFamily="34" charset="-122"/>
+                <a:cs typeface="Calibri" pitchFamily="34" charset="-120"/>
+              </a:rPr>
+              <a:t>13</a:t>
+            </a:r>
+            <a:endParaRPr lang="en-US" sz="1600" dirty="0"/>
+          </a:p>
+        </p:txBody>
+      </p:sp>
+      <p:sp>
+        <p:nvSpPr>
+          <p:cNvPr id="44" name="Shape 42"/>
+          <p:cNvSpPr/>
+          <p:nvPr/>
+        </p:nvSpPr>
+        <p:spPr>
+          <a:xfrm>
+            <a:off x="7607808" y="2834640"/>
+            <a:ext cx="566928" cy="566928"/>
+          </a:xfrm>
+          <a:prstGeom prst="roundRect">
+            <a:avLst>
+              <a:gd name="adj" fmla="val 12903"/>
+            </a:avLst>
+          </a:prstGeom>
+          <a:solidFill>
+            <a:srgbClr val="132A4E"/>
+          </a:solidFill>
+          <a:ln w="15875">
+            <a:solidFill>
+              <a:srgbClr val="24406E"/>
+            </a:solidFill>
+            <a:prstDash val="solid"/>
+          </a:ln>
+        </p:spPr>
+        <p:txBody>
+          <a:bodyPr/>
+          <a:lstStyle/>
+          <a:p>
+            <a:endParaRPr lang="fr-MA"/>
+          </a:p>
+        </p:txBody>
+      </p:sp>
+      <p:sp>
+        <p:nvSpPr>
+          <p:cNvPr id="45" name="Text 43"/>
+          <p:cNvSpPr/>
+          <p:nvPr/>
+        </p:nvSpPr>
+        <p:spPr>
+          <a:xfrm>
+            <a:off x="7607808" y="2834640"/>
+            <a:ext cx="566928" cy="566928"/>
+          </a:xfrm>
+          <a:prstGeom prst="rect">
+            <a:avLst/>
+          </a:prstGeom>
+          <a:noFill/>
+          <a:ln/>
+        </p:spPr>
+        <p:txBody>
+          <a:bodyPr wrap="square" lIns="0" tIns="0" rIns="0" bIns="0" rtlCol="0" anchor="ctr"/>
+          <a:lstStyle/>
+          <a:p>
+            <a:pPr marL="0" indent="0" algn="ctr">
+              <a:buNone/>
+            </a:pPr>
+            <a:r>
+              <a:rPr lang="en-US" sz="1600" b="1" dirty="0">
+                <a:solidFill>
+                  <a:srgbClr val="FFFFFF"/>
+                </a:solidFill>
+                <a:latin typeface="Calibri" pitchFamily="34" charset="0"/>
+                <a:ea typeface="Calibri" pitchFamily="34" charset="-122"/>
+                <a:cs typeface="Calibri" pitchFamily="34" charset="-120"/>
+              </a:rPr>
+              <a:t>15</a:t>
+            </a:r>
+            <a:endParaRPr lang="en-US" sz="1600" dirty="0"/>
+          </a:p>
+        </p:txBody>
+      </p:sp>
+      <p:sp>
+        <p:nvSpPr>
+          <p:cNvPr id="46" name="Shape 44"/>
+          <p:cNvSpPr/>
+          <p:nvPr/>
+        </p:nvSpPr>
+        <p:spPr>
+          <a:xfrm>
+            <a:off x="8302752" y="2834640"/>
+            <a:ext cx="566928" cy="566928"/>
+          </a:xfrm>
+          <a:prstGeom prst="roundRect">
+            <a:avLst>
+              <a:gd name="adj" fmla="val 12903"/>
+            </a:avLst>
+          </a:prstGeom>
+          <a:solidFill>
+            <a:srgbClr val="132A4E"/>
+          </a:solidFill>
+          <a:ln w="15875">
+            <a:solidFill>
+              <a:srgbClr val="24406E"/>
+            </a:solidFill>
+            <a:prstDash val="solid"/>
+          </a:ln>
+        </p:spPr>
+        <p:txBody>
+          <a:bodyPr/>
+          <a:lstStyle/>
+          <a:p>
+            <a:endParaRPr lang="fr-MA"/>
+          </a:p>
+        </p:txBody>
+      </p:sp>
+      <p:sp>
+        <p:nvSpPr>
+          <p:cNvPr id="47" name="Text 45"/>
+          <p:cNvSpPr/>
+          <p:nvPr/>
+        </p:nvSpPr>
+        <p:spPr>
+          <a:xfrm>
+            <a:off x="8302752" y="2834640"/>
+            <a:ext cx="566928" cy="566928"/>
+          </a:xfrm>
+          <a:prstGeom prst="rect">
+            <a:avLst/>
+          </a:prstGeom>
+          <a:noFill/>
+          <a:ln/>
+        </p:spPr>
+        <p:txBody>
+          <a:bodyPr wrap="square" lIns="0" tIns="0" rIns="0" bIns="0" rtlCol="0" anchor="ctr"/>
+          <a:lstStyle/>
+          <a:p>
+            <a:pPr marL="0" indent="0" algn="ctr">
+              <a:buNone/>
+            </a:pPr>
+            <a:r>
+              <a:rPr lang="en-US" sz="1600" b="1" dirty="0">
+                <a:solidFill>
+                  <a:srgbClr val="FFFFFF"/>
+                </a:solidFill>
+                <a:latin typeface="Calibri" pitchFamily="34" charset="0"/>
+                <a:ea typeface="Calibri" pitchFamily="34" charset="-122"/>
+                <a:cs typeface="Calibri" pitchFamily="34" charset="-120"/>
+              </a:rPr>
+              <a:t>17</a:t>
+            </a:r>
+            <a:endParaRPr lang="en-US" sz="1600" dirty="0"/>
+          </a:p>
+        </p:txBody>
+      </p:sp>
+      <p:sp>
+        <p:nvSpPr>
+          <p:cNvPr id="48" name="Text 46"/>
+          <p:cNvSpPr/>
+          <p:nvPr/>
+        </p:nvSpPr>
+        <p:spPr>
+          <a:xfrm>
+            <a:off x="9189720" y="2834640"/>
+            <a:ext cx="2743200" cy="566928"/>
+          </a:xfrm>
+          <a:prstGeom prst="rect">
+            <a:avLst/>
+          </a:prstGeom>
+          <a:noFill/>
+          <a:ln/>
+        </p:spPr>
+        <p:txBody>
+          <a:bodyPr wrap="square" lIns="0" tIns="0" rIns="0" bIns="0" rtlCol="0" anchor="ctr"/>
+          <a:lstStyle/>
+          <a:p>
+            <a:pPr marL="0" indent="0" algn="l">
+              <a:buNone/>
+            </a:pPr>
+            <a:r>
+              <a:rPr lang="en-US" sz="1250" i="1" dirty="0">
+                <a:solidFill>
+                  <a:srgbClr val="9FB3CF"/>
+                </a:solidFill>
+                <a:latin typeface="Calibri" pitchFamily="34" charset="0"/>
+                <a:ea typeface="Calibri" pitchFamily="34" charset="-122"/>
+                <a:cs typeface="Calibri" pitchFamily="34" charset="-120"/>
+              </a:rPr>
+              <a:t>15 &gt; 13 → search right half</a:t>
+            </a:r>
+            <a:endParaRPr lang="en-US" sz="1250" dirty="0"/>
+          </a:p>
+        </p:txBody>
+      </p:sp>
+      <p:sp>
+        <p:nvSpPr>
+          <p:cNvPr id="49" name="Text 47"/>
+          <p:cNvSpPr/>
+          <p:nvPr/>
+        </p:nvSpPr>
+        <p:spPr>
+          <a:xfrm>
+            <a:off x="640080" y="3886200"/>
+            <a:ext cx="1828800" cy="340157"/>
+          </a:xfrm>
+          <a:prstGeom prst="rect">
+            <a:avLst/>
+          </a:prstGeom>
+          <a:noFill/>
+          <a:ln/>
+        </p:spPr>
+        <p:txBody>
+          <a:bodyPr wrap="square" lIns="0" tIns="0" rIns="0" bIns="0" rtlCol="0" anchor="b"/>
+          <a:lstStyle/>
+          <a:p>
+            <a:pPr marL="0" indent="0" algn="l">
+              <a:buNone/>
+            </a:pPr>
+            <a:r>
+              <a:rPr lang="en-US" sz="1500" b="1" dirty="0">
+                <a:solidFill>
+                  <a:srgbClr val="FFFFFF"/>
+                </a:solidFill>
+                <a:latin typeface="Calibri" pitchFamily="34" charset="0"/>
+                <a:ea typeface="Calibri" pitchFamily="34" charset="-122"/>
+                <a:cs typeface="Calibri" pitchFamily="34" charset="-120"/>
+              </a:rPr>
+              <a:t>Step 3</a:t>
+            </a:r>
+            <a:endParaRPr lang="en-US" sz="1500" dirty="0"/>
+          </a:p>
+        </p:txBody>
+      </p:sp>
+      <p:sp>
+        <p:nvSpPr>
+          <p:cNvPr id="50" name="Text 48"/>
+          <p:cNvSpPr/>
+          <p:nvPr/>
+        </p:nvSpPr>
+        <p:spPr>
+          <a:xfrm>
+            <a:off x="640080" y="4198010"/>
+            <a:ext cx="2103120" cy="226771"/>
+          </a:xfrm>
+          <a:prstGeom prst="rect">
+            <a:avLst/>
+          </a:prstGeom>
+          <a:noFill/>
+          <a:ln/>
+        </p:spPr>
+        <p:txBody>
+          <a:bodyPr wrap="square" lIns="0" tIns="0" rIns="0" bIns="0" rtlCol="0" anchor="t"/>
+          <a:lstStyle/>
+          <a:p>
+            <a:pPr marL="0" indent="0" algn="l">
+              <a:buNone/>
+            </a:pPr>
+            <a:r>
+              <a:rPr lang="en-US" sz="1050" dirty="0">
+                <a:solidFill>
+                  <a:srgbClr val="9FB3CF"/>
+                </a:solidFill>
+                <a:latin typeface="Calibri" pitchFamily="34" charset="0"/>
+                <a:ea typeface="Calibri" pitchFamily="34" charset="-122"/>
+                <a:cs typeface="Calibri" pitchFamily="34" charset="-120"/>
+              </a:rPr>
+              <a:t>compare with 15</a:t>
+            </a:r>
+            <a:endParaRPr lang="en-US" sz="1050" dirty="0"/>
+          </a:p>
+        </p:txBody>
+      </p:sp>
+      <p:sp>
+        <p:nvSpPr>
+          <p:cNvPr id="51" name="Shape 49"/>
+          <p:cNvSpPr/>
+          <p:nvPr/>
+        </p:nvSpPr>
+        <p:spPr>
+          <a:xfrm>
+            <a:off x="2743200" y="3886200"/>
+            <a:ext cx="566928" cy="566928"/>
+          </a:xfrm>
+          <a:prstGeom prst="roundRect">
+            <a:avLst>
+              <a:gd name="adj" fmla="val 12903"/>
+            </a:avLst>
+          </a:prstGeom>
+          <a:solidFill>
+            <a:srgbClr val="0A1930"/>
+          </a:solidFill>
+          <a:ln w="15875">
+            <a:solidFill>
+              <a:srgbClr val="1B2C4A"/>
+            </a:solidFill>
+            <a:prstDash val="solid"/>
+          </a:ln>
+        </p:spPr>
+        <p:txBody>
+          <a:bodyPr/>
+          <a:lstStyle/>
+          <a:p>
+            <a:endParaRPr lang="fr-MA"/>
+          </a:p>
+        </p:txBody>
+      </p:sp>
+      <p:sp>
+        <p:nvSpPr>
+          <p:cNvPr id="52" name="Text 50"/>
+          <p:cNvSpPr/>
+          <p:nvPr/>
+        </p:nvSpPr>
+        <p:spPr>
+          <a:xfrm>
+            <a:off x="2743200" y="3886200"/>
+            <a:ext cx="566928" cy="566928"/>
+          </a:xfrm>
+          <a:prstGeom prst="rect">
+            <a:avLst/>
+          </a:prstGeom>
+          <a:noFill/>
+          <a:ln/>
+        </p:spPr>
+        <p:txBody>
+          <a:bodyPr wrap="square" lIns="0" tIns="0" rIns="0" bIns="0" rtlCol="0" anchor="ctr"/>
+          <a:lstStyle/>
+          <a:p>
+            <a:pPr marL="0" indent="0" algn="ctr">
+              <a:buNone/>
+            </a:pPr>
+            <a:r>
+              <a:rPr lang="en-US" sz="1600" b="1" dirty="0">
+                <a:solidFill>
+                  <a:srgbClr val="3E5273"/>
+                </a:solidFill>
+                <a:latin typeface="Calibri" pitchFamily="34" charset="0"/>
+                <a:ea typeface="Calibri" pitchFamily="34" charset="-122"/>
+                <a:cs typeface="Calibri" pitchFamily="34" charset="-120"/>
+              </a:rPr>
+              <a:t>1</a:t>
+            </a:r>
+            <a:endParaRPr lang="en-US" sz="1600" dirty="0"/>
+          </a:p>
+        </p:txBody>
+      </p:sp>
+      <p:sp>
+        <p:nvSpPr>
+          <p:cNvPr id="53" name="Shape 51"/>
+          <p:cNvSpPr/>
+          <p:nvPr/>
+        </p:nvSpPr>
+        <p:spPr>
+          <a:xfrm>
+            <a:off x="3438144" y="3886200"/>
+            <a:ext cx="566928" cy="566928"/>
+          </a:xfrm>
+          <a:prstGeom prst="roundRect">
+            <a:avLst>
+              <a:gd name="adj" fmla="val 12903"/>
+            </a:avLst>
+          </a:prstGeom>
+          <a:solidFill>
+            <a:srgbClr val="0A1930"/>
+          </a:solidFill>
+          <a:ln w="15875">
+            <a:solidFill>
+              <a:srgbClr val="1B2C4A"/>
+            </a:solidFill>
+            <a:prstDash val="solid"/>
+          </a:ln>
+        </p:spPr>
+        <p:txBody>
+          <a:bodyPr/>
+          <a:lstStyle/>
+          <a:p>
+            <a:endParaRPr lang="fr-MA"/>
+          </a:p>
+        </p:txBody>
+      </p:sp>
+      <p:sp>
+        <p:nvSpPr>
+          <p:cNvPr id="54" name="Text 52"/>
+          <p:cNvSpPr/>
+          <p:nvPr/>
+        </p:nvSpPr>
+        <p:spPr>
+          <a:xfrm>
+            <a:off x="3438144" y="3886200"/>
+            <a:ext cx="566928" cy="566928"/>
+          </a:xfrm>
+          <a:prstGeom prst="rect">
+            <a:avLst/>
+          </a:prstGeom>
+          <a:noFill/>
+          <a:ln/>
+        </p:spPr>
+        <p:txBody>
+          <a:bodyPr wrap="square" lIns="0" tIns="0" rIns="0" bIns="0" rtlCol="0" anchor="ctr"/>
+          <a:lstStyle/>
+          <a:p>
+            <a:pPr marL="0" indent="0" algn="ctr">
+              <a:buNone/>
+            </a:pPr>
+            <a:r>
+              <a:rPr lang="en-US" sz="1600" b="1" dirty="0">
+                <a:solidFill>
+                  <a:srgbClr val="3E5273"/>
+                </a:solidFill>
+                <a:latin typeface="Calibri" pitchFamily="34" charset="0"/>
+                <a:ea typeface="Calibri" pitchFamily="34" charset="-122"/>
+                <a:cs typeface="Calibri" pitchFamily="34" charset="-120"/>
+              </a:rPr>
+              <a:t>3</a:t>
+            </a:r>
+            <a:endParaRPr lang="en-US" sz="1600" dirty="0"/>
+          </a:p>
+        </p:txBody>
+      </p:sp>
+      <p:sp>
+        <p:nvSpPr>
+          <p:cNvPr id="55" name="Shape 53"/>
+          <p:cNvSpPr/>
+          <p:nvPr/>
+        </p:nvSpPr>
+        <p:spPr>
+          <a:xfrm>
+            <a:off x="4133088" y="3886200"/>
+            <a:ext cx="566928" cy="566928"/>
+          </a:xfrm>
+          <a:prstGeom prst="roundRect">
+            <a:avLst>
+              <a:gd name="adj" fmla="val 12903"/>
+            </a:avLst>
+          </a:prstGeom>
+          <a:solidFill>
+            <a:srgbClr val="0A1930"/>
+          </a:solidFill>
+          <a:ln w="15875">
+            <a:solidFill>
+              <a:srgbClr val="1B2C4A"/>
+            </a:solidFill>
+            <a:prstDash val="solid"/>
+          </a:ln>
+        </p:spPr>
+        <p:txBody>
+          <a:bodyPr/>
+          <a:lstStyle/>
+          <a:p>
+            <a:endParaRPr lang="fr-MA"/>
+          </a:p>
+        </p:txBody>
+      </p:sp>
+      <p:sp>
+        <p:nvSpPr>
+          <p:cNvPr id="56" name="Text 54"/>
+          <p:cNvSpPr/>
+          <p:nvPr/>
+        </p:nvSpPr>
+        <p:spPr>
+          <a:xfrm>
+            <a:off x="4133088" y="3886200"/>
+            <a:ext cx="566928" cy="566928"/>
+          </a:xfrm>
+          <a:prstGeom prst="rect">
+            <a:avLst/>
+          </a:prstGeom>
+          <a:noFill/>
+          <a:ln/>
+        </p:spPr>
+        <p:txBody>
+          <a:bodyPr wrap="square" lIns="0" tIns="0" rIns="0" bIns="0" rtlCol="0" anchor="ctr"/>
+          <a:lstStyle/>
+          <a:p>
+            <a:pPr marL="0" indent="0" algn="ctr">
+              <a:buNone/>
+            </a:pPr>
+            <a:r>
+              <a:rPr lang="en-US" sz="1600" b="1" dirty="0">
+                <a:solidFill>
+                  <a:srgbClr val="3E5273"/>
+                </a:solidFill>
+                <a:latin typeface="Calibri" pitchFamily="34" charset="0"/>
+                <a:ea typeface="Calibri" pitchFamily="34" charset="-122"/>
+                <a:cs typeface="Calibri" pitchFamily="34" charset="-120"/>
+              </a:rPr>
+              <a:t>5</a:t>
+            </a:r>
+            <a:endParaRPr lang="en-US" sz="1600" dirty="0"/>
+          </a:p>
+        </p:txBody>
+      </p:sp>
+      <p:sp>
+        <p:nvSpPr>
+          <p:cNvPr id="57" name="Shape 55"/>
+          <p:cNvSpPr/>
+          <p:nvPr/>
+        </p:nvSpPr>
+        <p:spPr>
+          <a:xfrm>
+            <a:off x="4828032" y="3886200"/>
+            <a:ext cx="566928" cy="566928"/>
+          </a:xfrm>
+          <a:prstGeom prst="roundRect">
+            <a:avLst>
+              <a:gd name="adj" fmla="val 12903"/>
+            </a:avLst>
+          </a:prstGeom>
+          <a:solidFill>
+            <a:srgbClr val="0A1930"/>
+          </a:solidFill>
+          <a:ln w="15875">
+            <a:solidFill>
+              <a:srgbClr val="1B2C4A"/>
+            </a:solidFill>
+            <a:prstDash val="solid"/>
+          </a:ln>
+        </p:spPr>
+        <p:txBody>
+          <a:bodyPr/>
+          <a:lstStyle/>
+          <a:p>
+            <a:endParaRPr lang="fr-MA"/>
+          </a:p>
+        </p:txBody>
+      </p:sp>
+      <p:sp>
+        <p:nvSpPr>
+          <p:cNvPr id="58" name="Text 56"/>
+          <p:cNvSpPr/>
+          <p:nvPr/>
+        </p:nvSpPr>
+        <p:spPr>
+          <a:xfrm>
+            <a:off x="4828032" y="3886200"/>
+            <a:ext cx="566928" cy="566928"/>
+          </a:xfrm>
+          <a:prstGeom prst="rect">
+            <a:avLst/>
+          </a:prstGeom>
+          <a:noFill/>
+          <a:ln/>
+        </p:spPr>
+        <p:txBody>
+          <a:bodyPr wrap="square" lIns="0" tIns="0" rIns="0" bIns="0" rtlCol="0" anchor="ctr"/>
+          <a:lstStyle/>
+          <a:p>
+            <a:pPr marL="0" indent="0" algn="ctr">
+              <a:buNone/>
+            </a:pPr>
+            <a:r>
+              <a:rPr lang="en-US" sz="1600" b="1" dirty="0">
+                <a:solidFill>
+                  <a:srgbClr val="3E5273"/>
+                </a:solidFill>
+                <a:latin typeface="Calibri" pitchFamily="34" charset="0"/>
+                <a:ea typeface="Calibri" pitchFamily="34" charset="-122"/>
+                <a:cs typeface="Calibri" pitchFamily="34" charset="-120"/>
+              </a:rPr>
+              <a:t>7</a:t>
+            </a:r>
+            <a:endParaRPr lang="en-US" sz="1600" dirty="0"/>
+          </a:p>
+        </p:txBody>
+      </p:sp>
+      <p:sp>
+        <p:nvSpPr>
+          <p:cNvPr id="59" name="Shape 57"/>
+          <p:cNvSpPr/>
+          <p:nvPr/>
+        </p:nvSpPr>
+        <p:spPr>
+          <a:xfrm>
+            <a:off x="5522976" y="3886200"/>
+            <a:ext cx="566928" cy="566928"/>
+          </a:xfrm>
+          <a:prstGeom prst="roundRect">
+            <a:avLst>
+              <a:gd name="adj" fmla="val 12903"/>
+            </a:avLst>
+          </a:prstGeom>
+          <a:solidFill>
+            <a:srgbClr val="0A1930"/>
+          </a:solidFill>
+          <a:ln w="15875">
+            <a:solidFill>
+              <a:srgbClr val="1B2C4A"/>
+            </a:solidFill>
+            <a:prstDash val="solid"/>
+          </a:ln>
+        </p:spPr>
+        <p:txBody>
+          <a:bodyPr/>
+          <a:lstStyle/>
+          <a:p>
+            <a:endParaRPr lang="fr-MA"/>
+          </a:p>
+        </p:txBody>
+      </p:sp>
+      <p:sp>
+        <p:nvSpPr>
+          <p:cNvPr id="60" name="Text 58"/>
+          <p:cNvSpPr/>
+          <p:nvPr/>
+        </p:nvSpPr>
+        <p:spPr>
+          <a:xfrm>
+            <a:off x="5522976" y="3886200"/>
+            <a:ext cx="566928" cy="566928"/>
+          </a:xfrm>
+          <a:prstGeom prst="rect">
+            <a:avLst/>
+          </a:prstGeom>
+          <a:noFill/>
+          <a:ln/>
+        </p:spPr>
+        <p:txBody>
+          <a:bodyPr wrap="square" lIns="0" tIns="0" rIns="0" bIns="0" rtlCol="0" anchor="ctr"/>
+          <a:lstStyle/>
+          <a:p>
+            <a:pPr marL="0" indent="0" algn="ctr">
+              <a:buNone/>
+            </a:pPr>
+            <a:r>
+              <a:rPr lang="en-US" sz="1600" b="1" dirty="0">
+                <a:solidFill>
+                  <a:srgbClr val="3E5273"/>
+                </a:solidFill>
+                <a:latin typeface="Calibri" pitchFamily="34" charset="0"/>
+                <a:ea typeface="Calibri" pitchFamily="34" charset="-122"/>
+                <a:cs typeface="Calibri" pitchFamily="34" charset="-120"/>
+              </a:rPr>
+              <a:t>9</a:t>
+            </a:r>
+            <a:endParaRPr lang="en-US" sz="1600" dirty="0"/>
+          </a:p>
+        </p:txBody>
+      </p:sp>
+      <p:sp>
+        <p:nvSpPr>
+          <p:cNvPr id="61" name="Shape 59"/>
+          <p:cNvSpPr/>
+          <p:nvPr/>
+        </p:nvSpPr>
+        <p:spPr>
+          <a:xfrm>
+            <a:off x="6217920" y="3886200"/>
+            <a:ext cx="566928" cy="566928"/>
+          </a:xfrm>
+          <a:prstGeom prst="roundRect">
+            <a:avLst>
+              <a:gd name="adj" fmla="val 12903"/>
+            </a:avLst>
+          </a:prstGeom>
+          <a:solidFill>
+            <a:srgbClr val="0A1930"/>
+          </a:solidFill>
+          <a:ln w="15875">
+            <a:solidFill>
+              <a:srgbClr val="1B2C4A"/>
+            </a:solidFill>
+            <a:prstDash val="solid"/>
+          </a:ln>
+        </p:spPr>
+        <p:txBody>
+          <a:bodyPr/>
+          <a:lstStyle/>
+          <a:p>
+            <a:endParaRPr lang="fr-MA"/>
+          </a:p>
+        </p:txBody>
+      </p:sp>
+      <p:sp>
+        <p:nvSpPr>
+          <p:cNvPr id="62" name="Text 60"/>
+          <p:cNvSpPr/>
+          <p:nvPr/>
+        </p:nvSpPr>
+        <p:spPr>
+          <a:xfrm>
+            <a:off x="6217920" y="3886200"/>
+            <a:ext cx="566928" cy="566928"/>
+          </a:xfrm>
+          <a:prstGeom prst="rect">
+            <a:avLst/>
+          </a:prstGeom>
+          <a:noFill/>
+          <a:ln/>
+        </p:spPr>
+        <p:txBody>
+          <a:bodyPr wrap="square" lIns="0" tIns="0" rIns="0" bIns="0" rtlCol="0" anchor="ctr"/>
+          <a:lstStyle/>
+          <a:p>
+            <a:pPr marL="0" indent="0" algn="ctr">
+              <a:buNone/>
+            </a:pPr>
+            <a:r>
+              <a:rPr lang="en-US" sz="1600" b="1" dirty="0">
+                <a:solidFill>
+                  <a:srgbClr val="3E5273"/>
+                </a:solidFill>
+                <a:latin typeface="Calibri" pitchFamily="34" charset="0"/>
+                <a:ea typeface="Calibri" pitchFamily="34" charset="-122"/>
+                <a:cs typeface="Calibri" pitchFamily="34" charset="-120"/>
+              </a:rPr>
+              <a:t>11</a:t>
+            </a:r>
+            <a:endParaRPr lang="en-US" sz="1600" dirty="0"/>
+          </a:p>
+        </p:txBody>
+      </p:sp>
+      <p:sp>
+        <p:nvSpPr>
+          <p:cNvPr id="63" name="Shape 61"/>
+          <p:cNvSpPr/>
+          <p:nvPr/>
+        </p:nvSpPr>
+        <p:spPr>
+          <a:xfrm>
+            <a:off x="6912864" y="3886200"/>
+            <a:ext cx="566928" cy="566928"/>
+          </a:xfrm>
+          <a:prstGeom prst="roundRect">
+            <a:avLst>
+              <a:gd name="adj" fmla="val 12903"/>
+            </a:avLst>
+          </a:prstGeom>
+          <a:solidFill>
+            <a:srgbClr val="0A1930"/>
+          </a:solidFill>
+          <a:ln w="15875">
+            <a:solidFill>
+              <a:srgbClr val="1B2C4A"/>
+            </a:solidFill>
+            <a:prstDash val="solid"/>
+          </a:ln>
+        </p:spPr>
+        <p:txBody>
+          <a:bodyPr/>
+          <a:lstStyle/>
+          <a:p>
+            <a:endParaRPr lang="fr-MA"/>
+          </a:p>
+        </p:txBody>
+      </p:sp>
+      <p:sp>
+        <p:nvSpPr>
+          <p:cNvPr id="64" name="Text 62"/>
+          <p:cNvSpPr/>
+          <p:nvPr/>
+        </p:nvSpPr>
+        <p:spPr>
+          <a:xfrm>
+            <a:off x="6912864" y="3886200"/>
+            <a:ext cx="566928" cy="566928"/>
+          </a:xfrm>
+          <a:prstGeom prst="rect">
+            <a:avLst/>
+          </a:prstGeom>
+          <a:noFill/>
+          <a:ln/>
+        </p:spPr>
+        <p:txBody>
+          <a:bodyPr wrap="square" lIns="0" tIns="0" rIns="0" bIns="0" rtlCol="0" anchor="ctr"/>
+          <a:lstStyle/>
+          <a:p>
+            <a:pPr marL="0" indent="0" algn="ctr">
+              <a:buNone/>
+            </a:pPr>
+            <a:r>
+              <a:rPr lang="en-US" sz="1600" b="1" dirty="0">
+                <a:solidFill>
+                  <a:srgbClr val="3E5273"/>
+                </a:solidFill>
+                <a:latin typeface="Calibri" pitchFamily="34" charset="0"/>
+                <a:ea typeface="Calibri" pitchFamily="34" charset="-122"/>
+                <a:cs typeface="Calibri" pitchFamily="34" charset="-120"/>
+              </a:rPr>
+              <a:t>13</a:t>
+            </a:r>
+            <a:endParaRPr lang="en-US" sz="1600" dirty="0"/>
+          </a:p>
+        </p:txBody>
+      </p:sp>
+      <p:sp>
+        <p:nvSpPr>
+          <p:cNvPr id="65" name="Shape 63"/>
+          <p:cNvSpPr/>
+          <p:nvPr/>
+        </p:nvSpPr>
+        <p:spPr>
+          <a:xfrm>
+            <a:off x="7607808" y="3886200"/>
+            <a:ext cx="566928" cy="566928"/>
+          </a:xfrm>
+          <a:prstGeom prst="roundRect">
+            <a:avLst>
+              <a:gd name="adj" fmla="val 12903"/>
+            </a:avLst>
+          </a:prstGeom>
+          <a:solidFill>
+            <a:srgbClr val="D4AF37"/>
+          </a:solidFill>
+          <a:ln w="15875">
+            <a:solidFill>
+              <a:srgbClr val="D4AF37"/>
+            </a:solidFill>
+            <a:prstDash val="solid"/>
+          </a:ln>
+        </p:spPr>
+        <p:txBody>
+          <a:bodyPr/>
+          <a:lstStyle/>
+          <a:p>
+            <a:endParaRPr lang="fr-MA"/>
+          </a:p>
+        </p:txBody>
+      </p:sp>
+      <p:sp>
+        <p:nvSpPr>
+          <p:cNvPr id="66" name="Text 64"/>
+          <p:cNvSpPr/>
+          <p:nvPr/>
+        </p:nvSpPr>
+        <p:spPr>
+          <a:xfrm>
+            <a:off x="7607808" y="3886200"/>
+            <a:ext cx="566928" cy="566928"/>
+          </a:xfrm>
+          <a:prstGeom prst="rect">
+            <a:avLst/>
+          </a:prstGeom>
+          <a:noFill/>
+          <a:ln/>
+        </p:spPr>
+        <p:txBody>
+          <a:bodyPr wrap="square" lIns="0" tIns="0" rIns="0" bIns="0" rtlCol="0" anchor="ctr"/>
+          <a:lstStyle/>
+          <a:p>
+            <a:pPr marL="0" indent="0" algn="ctr">
+              <a:buNone/>
+            </a:pPr>
+            <a:r>
+              <a:rPr lang="en-US" sz="1600" b="1" dirty="0">
+                <a:solidFill>
+                  <a:srgbClr val="0A1930"/>
+                </a:solidFill>
+                <a:latin typeface="Calibri" pitchFamily="34" charset="0"/>
+                <a:ea typeface="Calibri" pitchFamily="34" charset="-122"/>
+                <a:cs typeface="Calibri" pitchFamily="34" charset="-120"/>
+              </a:rPr>
+              <a:t>15</a:t>
+            </a:r>
+            <a:endParaRPr lang="en-US" sz="1600" dirty="0"/>
+          </a:p>
+        </p:txBody>
+      </p:sp>
+      <p:sp>
+        <p:nvSpPr>
+          <p:cNvPr id="67" name="Shape 65"/>
+          <p:cNvSpPr/>
+          <p:nvPr/>
+        </p:nvSpPr>
+        <p:spPr>
+          <a:xfrm>
+            <a:off x="8302752" y="3886200"/>
+            <a:ext cx="566928" cy="566928"/>
+          </a:xfrm>
+          <a:prstGeom prst="roundRect">
+            <a:avLst>
+              <a:gd name="adj" fmla="val 12903"/>
+            </a:avLst>
+          </a:prstGeom>
+          <a:solidFill>
+            <a:srgbClr val="132A4E"/>
+          </a:solidFill>
+          <a:ln w="15875">
+            <a:solidFill>
+              <a:srgbClr val="24406E"/>
+            </a:solidFill>
+            <a:prstDash val="solid"/>
+          </a:ln>
+        </p:spPr>
+        <p:txBody>
+          <a:bodyPr/>
+          <a:lstStyle/>
+          <a:p>
+            <a:endParaRPr lang="fr-MA"/>
+          </a:p>
+        </p:txBody>
+      </p:sp>
+      <p:sp>
+        <p:nvSpPr>
+          <p:cNvPr id="68" name="Text 66"/>
+          <p:cNvSpPr/>
+          <p:nvPr/>
+        </p:nvSpPr>
+        <p:spPr>
+          <a:xfrm>
+            <a:off x="8302752" y="3886200"/>
+            <a:ext cx="566928" cy="566928"/>
+          </a:xfrm>
+          <a:prstGeom prst="rect">
+            <a:avLst/>
+          </a:prstGeom>
+          <a:noFill/>
+          <a:ln/>
+        </p:spPr>
+        <p:txBody>
+          <a:bodyPr wrap="square" lIns="0" tIns="0" rIns="0" bIns="0" rtlCol="0" anchor="ctr"/>
+          <a:lstStyle/>
+          <a:p>
+            <a:pPr marL="0" indent="0" algn="ctr">
+              <a:buNone/>
+            </a:pPr>
+            <a:r>
+              <a:rPr lang="en-US" sz="1600" b="1" dirty="0">
+                <a:solidFill>
+                  <a:srgbClr val="FFFFFF"/>
+                </a:solidFill>
+                <a:latin typeface="Calibri" pitchFamily="34" charset="0"/>
+                <a:ea typeface="Calibri" pitchFamily="34" charset="-122"/>
+                <a:cs typeface="Calibri" pitchFamily="34" charset="-120"/>
+              </a:rPr>
+              <a:t>17</a:t>
+            </a:r>
+            <a:endParaRPr lang="en-US" sz="1600" dirty="0"/>
+          </a:p>
+        </p:txBody>
+      </p:sp>
+      <p:sp>
+        <p:nvSpPr>
+          <p:cNvPr id="69" name="Text 67"/>
+          <p:cNvSpPr/>
+          <p:nvPr/>
+        </p:nvSpPr>
+        <p:spPr>
+          <a:xfrm>
+            <a:off x="9189720" y="3886200"/>
+            <a:ext cx="2743200" cy="566928"/>
+          </a:xfrm>
+          <a:prstGeom prst="rect">
+            <a:avLst/>
+          </a:prstGeom>
+          <a:noFill/>
+          <a:ln/>
+        </p:spPr>
+        <p:txBody>
+          <a:bodyPr wrap="square" lIns="0" tIns="0" rIns="0" bIns="0" rtlCol="0" anchor="ctr"/>
+          <a:lstStyle/>
+          <a:p>
+            <a:pPr marL="0" indent="0" algn="l">
+              <a:buNone/>
+            </a:pPr>
+            <a:r>
+              <a:rPr lang="en-US" sz="1250" i="1" dirty="0">
+                <a:solidFill>
+                  <a:srgbClr val="D4AF37"/>
+                </a:solidFill>
+                <a:latin typeface="Calibri" pitchFamily="34" charset="0"/>
+                <a:ea typeface="Calibri" pitchFamily="34" charset="-122"/>
+                <a:cs typeface="Calibri" pitchFamily="34" charset="-120"/>
+              </a:rPr>
+              <a:t>15 = 15 → target found!</a:t>
+            </a:r>
+            <a:endParaRPr lang="en-US" sz="1250" dirty="0"/>
+          </a:p>
+        </p:txBody>
+      </p:sp>
+      <p:sp>
+        <p:nvSpPr>
+          <p:cNvPr id="70" name="Text 68"/>
+          <p:cNvSpPr/>
+          <p:nvPr/>
+        </p:nvSpPr>
+        <p:spPr>
+          <a:xfrm>
+            <a:off x="640080" y="5074920"/>
+            <a:ext cx="10881360" cy="365760"/>
+          </a:xfrm>
+          <a:prstGeom prst="rect">
+            <a:avLst/>
+          </a:prstGeom>
+          <a:noFill/>
+          <a:ln/>
+        </p:spPr>
+        <p:txBody>
+          <a:bodyPr wrap="square" lIns="0" tIns="0" rIns="0" bIns="0" rtlCol="0" anchor="t"/>
+          <a:lstStyle/>
+          <a:p>
+            <a:pPr marL="0" indent="0" algn="l">
+              <a:buNone/>
+            </a:pPr>
+            <a:r>
+              <a:rPr lang="en-US" sz="1200" dirty="0">
+                <a:solidFill>
+                  <a:srgbClr val="E9CE72"/>
+                </a:solidFill>
+                <a:latin typeface="Calibri" pitchFamily="34" charset="0"/>
+                <a:ea typeface="Calibri" pitchFamily="34" charset="-122"/>
+                <a:cs typeface="Calibri" pitchFamily="34" charset="-120"/>
+              </a:rPr>
+              <a:t>Target: 15  •  Array is sorted, length 9  •  Found in 3 comparisons (vs. up to 9 for a linear scan)</a:t>
+            </a:r>
+            <a:endParaRPr lang="en-US" sz="1200" dirty="0"/>
+          </a:p>
+        </p:txBody>
+      </p:sp>
+      <p:sp>
+        <p:nvSpPr>
+          <p:cNvPr id="71" name="Shape 69"/>
+          <p:cNvSpPr/>
+          <p:nvPr/>
+        </p:nvSpPr>
+        <p:spPr>
+          <a:xfrm>
+            <a:off x="4206240" y="6080760"/>
+            <a:ext cx="274320" cy="274320"/>
+          </a:xfrm>
+          <a:prstGeom prst="roundRect">
+            <a:avLst>
+              <a:gd name="adj" fmla="val 20000"/>
+            </a:avLst>
+          </a:prstGeom>
+          <a:solidFill>
+            <a:srgbClr val="D4AF37"/>
+          </a:solidFill>
+          <a:ln w="15875">
+            <a:solidFill>
+              <a:srgbClr val="D4AF37"/>
+            </a:solidFill>
+            <a:prstDash val="solid"/>
+          </a:ln>
+        </p:spPr>
+        <p:txBody>
+          <a:bodyPr/>
+          <a:lstStyle/>
+          <a:p>
+            <a:endParaRPr lang="fr-MA"/>
+          </a:p>
+        </p:txBody>
+      </p:sp>
+      <p:sp>
+        <p:nvSpPr>
+          <p:cNvPr id="72" name="Text 70"/>
+          <p:cNvSpPr/>
+          <p:nvPr/>
+        </p:nvSpPr>
+        <p:spPr>
+          <a:xfrm>
+            <a:off x="4553712" y="6053328"/>
+            <a:ext cx="1737360" cy="329184"/>
+          </a:xfrm>
+          <a:prstGeom prst="rect">
+            <a:avLst/>
+          </a:prstGeom>
+          <a:noFill/>
+          <a:ln/>
+        </p:spPr>
+        <p:txBody>
+          <a:bodyPr wrap="square" lIns="0" tIns="0" rIns="0" bIns="0" rtlCol="0" anchor="ctr"/>
+          <a:lstStyle/>
+          <a:p>
+            <a:pPr marL="0" indent="0" algn="l">
+              <a:buNone/>
+            </a:pPr>
+            <a:r>
+              <a:rPr lang="en-US" sz="1050" dirty="0">
+                <a:solidFill>
+                  <a:srgbClr val="9FB3CF"/>
+                </a:solidFill>
+                <a:latin typeface="Calibri" pitchFamily="34" charset="0"/>
+                <a:ea typeface="Calibri" pitchFamily="34" charset="-122"/>
+                <a:cs typeface="Calibri" pitchFamily="34" charset="-120"/>
+              </a:rPr>
+              <a:t>Found</a:t>
+            </a:r>
+            <a:endParaRPr lang="en-US" sz="1050" dirty="0"/>
+          </a:p>
+        </p:txBody>
+      </p:sp>
+      <p:sp>
+        <p:nvSpPr>
+          <p:cNvPr id="73" name="Shape 71"/>
+          <p:cNvSpPr/>
+          <p:nvPr/>
+        </p:nvSpPr>
+        <p:spPr>
+          <a:xfrm>
+            <a:off x="6217920" y="6080760"/>
+            <a:ext cx="274320" cy="274320"/>
+          </a:xfrm>
+          <a:prstGeom prst="roundRect">
+            <a:avLst>
+              <a:gd name="adj" fmla="val 20000"/>
+            </a:avLst>
+          </a:prstGeom>
+          <a:solidFill>
+            <a:srgbClr val="132A4E"/>
+          </a:solidFill>
+          <a:ln w="15875">
+            <a:solidFill>
+              <a:srgbClr val="D4AF37"/>
+            </a:solidFill>
+            <a:prstDash val="solid"/>
+          </a:ln>
+        </p:spPr>
+        <p:txBody>
+          <a:bodyPr/>
+          <a:lstStyle/>
+          <a:p>
+            <a:endParaRPr lang="fr-MA"/>
+          </a:p>
+        </p:txBody>
+      </p:sp>
+      <p:sp>
+        <p:nvSpPr>
+          <p:cNvPr id="74" name="Text 72"/>
+          <p:cNvSpPr/>
+          <p:nvPr/>
+        </p:nvSpPr>
+        <p:spPr>
+          <a:xfrm>
+            <a:off x="6565392" y="6053328"/>
+            <a:ext cx="1737360" cy="329184"/>
+          </a:xfrm>
+          <a:prstGeom prst="rect">
+            <a:avLst/>
+          </a:prstGeom>
+          <a:noFill/>
+          <a:ln/>
+        </p:spPr>
+        <p:txBody>
+          <a:bodyPr wrap="square" lIns="0" tIns="0" rIns="0" bIns="0" rtlCol="0" anchor="ctr"/>
+          <a:lstStyle/>
+          <a:p>
+            <a:pPr marL="0" indent="0" algn="l">
+              <a:buNone/>
+            </a:pPr>
+            <a:r>
+              <a:rPr lang="en-US" sz="1050" dirty="0">
+                <a:solidFill>
+                  <a:srgbClr val="9FB3CF"/>
+                </a:solidFill>
+                <a:latin typeface="Calibri" pitchFamily="34" charset="0"/>
+                <a:ea typeface="Calibri" pitchFamily="34" charset="-122"/>
+                <a:cs typeface="Calibri" pitchFamily="34" charset="-120"/>
+              </a:rPr>
+              <a:t>Currently comparing</a:t>
+            </a:r>
+            <a:endParaRPr lang="en-US" sz="1050" dirty="0"/>
+          </a:p>
+        </p:txBody>
+      </p:sp>
+      <p:sp>
+        <p:nvSpPr>
+          <p:cNvPr id="75" name="Shape 73"/>
+          <p:cNvSpPr/>
+          <p:nvPr/>
+        </p:nvSpPr>
+        <p:spPr>
+          <a:xfrm>
+            <a:off x="8229600" y="6080760"/>
+            <a:ext cx="274320" cy="274320"/>
+          </a:xfrm>
+          <a:prstGeom prst="roundRect">
+            <a:avLst>
+              <a:gd name="adj" fmla="val 20000"/>
+            </a:avLst>
+          </a:prstGeom>
+          <a:solidFill>
+            <a:srgbClr val="132A4E"/>
+          </a:solidFill>
+          <a:ln w="15875">
+            <a:solidFill>
+              <a:srgbClr val="24406E"/>
+            </a:solidFill>
+            <a:prstDash val="solid"/>
+          </a:ln>
+        </p:spPr>
+        <p:txBody>
+          <a:bodyPr/>
+          <a:lstStyle/>
+          <a:p>
+            <a:endParaRPr lang="fr-MA"/>
+          </a:p>
+        </p:txBody>
+      </p:sp>
+      <p:sp>
+        <p:nvSpPr>
+          <p:cNvPr id="76" name="Text 74"/>
+          <p:cNvSpPr/>
+          <p:nvPr/>
+        </p:nvSpPr>
+        <p:spPr>
+          <a:xfrm>
+            <a:off x="8577072" y="6053328"/>
+            <a:ext cx="1737360" cy="329184"/>
+          </a:xfrm>
+          <a:prstGeom prst="rect">
+            <a:avLst/>
+          </a:prstGeom>
+          <a:noFill/>
+          <a:ln/>
+        </p:spPr>
+        <p:txBody>
+          <a:bodyPr wrap="square" lIns="0" tIns="0" rIns="0" bIns="0" rtlCol="0" anchor="ctr"/>
+          <a:lstStyle/>
+          <a:p>
+            <a:pPr marL="0" indent="0" algn="l">
+              <a:buNone/>
+            </a:pPr>
+            <a:r>
+              <a:rPr lang="en-US" sz="1050" dirty="0">
+                <a:solidFill>
+                  <a:srgbClr val="9FB3CF"/>
+                </a:solidFill>
+                <a:latin typeface="Calibri" pitchFamily="34" charset="0"/>
+                <a:ea typeface="Calibri" pitchFamily="34" charset="-122"/>
+                <a:cs typeface="Calibri" pitchFamily="34" charset="-120"/>
+              </a:rPr>
+              <a:t>Still in range</a:t>
+            </a:r>
+            <a:endParaRPr lang="en-US" sz="1050" dirty="0"/>
+          </a:p>
+        </p:txBody>
+      </p:sp>
+      <p:sp>
+        <p:nvSpPr>
+          <p:cNvPr id="77" name="Shape 75"/>
+          <p:cNvSpPr/>
+          <p:nvPr/>
+        </p:nvSpPr>
+        <p:spPr>
+          <a:xfrm>
+            <a:off x="10241280" y="6080760"/>
+            <a:ext cx="274320" cy="274320"/>
+          </a:xfrm>
+          <a:prstGeom prst="roundRect">
+            <a:avLst>
+              <a:gd name="adj" fmla="val 20000"/>
+            </a:avLst>
+          </a:prstGeom>
+          <a:solidFill>
+            <a:srgbClr val="0A1930"/>
+          </a:solidFill>
+          <a:ln w="15875">
+            <a:solidFill>
+              <a:srgbClr val="1B2C4A"/>
+            </a:solidFill>
+            <a:prstDash val="solid"/>
+          </a:ln>
+        </p:spPr>
+        <p:txBody>
+          <a:bodyPr/>
+          <a:lstStyle/>
+          <a:p>
+            <a:endParaRPr lang="fr-MA"/>
+          </a:p>
+        </p:txBody>
+      </p:sp>
+      <p:sp>
+        <p:nvSpPr>
+          <p:cNvPr id="78" name="Text 76"/>
+          <p:cNvSpPr/>
+          <p:nvPr/>
+        </p:nvSpPr>
+        <p:spPr>
+          <a:xfrm>
+            <a:off x="10588752" y="6053328"/>
+            <a:ext cx="1737360" cy="329184"/>
+          </a:xfrm>
+          <a:prstGeom prst="rect">
+            <a:avLst/>
+          </a:prstGeom>
+          <a:noFill/>
+          <a:ln/>
+        </p:spPr>
+        <p:txBody>
+          <a:bodyPr wrap="square" lIns="0" tIns="0" rIns="0" bIns="0" rtlCol="0" anchor="ctr"/>
+          <a:lstStyle/>
+          <a:p>
+            <a:pPr marL="0" indent="0" algn="l">
+              <a:buNone/>
+            </a:pPr>
+            <a:r>
+              <a:rPr lang="en-US" sz="1050" dirty="0">
+                <a:solidFill>
+                  <a:srgbClr val="9FB3CF"/>
+                </a:solidFill>
+                <a:latin typeface="Calibri" pitchFamily="34" charset="0"/>
+                <a:ea typeface="Calibri" pitchFamily="34" charset="-122"/>
+                <a:cs typeface="Calibri" pitchFamily="34" charset="-120"/>
+              </a:rPr>
+              <a:t>Eliminated</a:t>
+            </a:r>
+            <a:endParaRPr lang="en-US" sz="1050" dirty="0"/>
+          </a:p>
+        </p:txBody>
+      </p:sp>
+    </p:spTree>
+  </p:cSld>
+  <p:clrMapOvr>
+    <a:masterClrMapping/>
+  </p:clrMapOvr>
+  <mc:AlternateContent xmlns:mc="http://schemas.openxmlformats.org/markup-compatibility/2006" xmlns:p159="http://schemas.microsoft.com/office/powerpoint/2015/09/main">
+    <mc:Choice Requires="p159">
+      <p:transition xmlns:p14="http://schemas.microsoft.com/office/powerpoint/2010/main" spd="slow" p14:dur="2000">
+        <p159:morph option="byObject"/>
+      </p:transition>
+    </mc:Choice>
+    <mc:Fallback xmlns="">
+      <p:transition spd="slow">
+        <p:fade/>
+      </p:transition>
+    </mc:Fallback>
+  </mc:AlternateContent>
+</p:sld>
+</file>
+
+<file path=ppt/slides/slide12.xml><?xml version="1.0" encoding="utf-8"?>
+<p:sld xmlns:a="http://schemas.openxmlformats.org/drawingml/2006/main" xmlns:r="http://schemas.openxmlformats.org/officeDocument/2006/relationships" xmlns:p="http://schemas.openxmlformats.org/presentationml/2006/main">
+  <p:cSld>
+    <p:spTree>
+      <p:nvGrpSpPr>
+        <p:cNvPr id="1" name=""/>
+        <p:cNvGrpSpPr/>
+        <p:nvPr/>
+      </p:nvGrpSpPr>
+      <p:grpSpPr>
+        <a:xfrm>
+          <a:off x="0" y="0"/>
+          <a:ext cx="0" cy="0"/>
+          <a:chOff x="0" y="0"/>
+          <a:chExt cx="0" cy="0"/>
+        </a:xfrm>
+      </p:grpSpPr>
+      <p:sp>
+        <p:nvSpPr>
+          <p:cNvPr id="2" name="Shape 0"/>
+          <p:cNvSpPr/>
+          <p:nvPr/>
+        </p:nvSpPr>
+        <p:spPr>
+          <a:xfrm>
+            <a:off x="0" y="0"/>
+            <a:ext cx="12191695" cy="6858000"/>
+          </a:xfrm>
+          <a:prstGeom prst="rect">
+            <a:avLst/>
+          </a:prstGeom>
+          <a:solidFill>
+            <a:srgbClr val="0A1930"/>
+          </a:solidFill>
+          <a:ln/>
+        </p:spPr>
+        <p:txBody>
+          <a:bodyPr/>
+          <a:lstStyle/>
+          <a:p>
+            <a:endParaRPr lang="fr-MA"/>
+          </a:p>
+        </p:txBody>
+      </p:sp>
+      <p:sp>
+        <p:nvSpPr>
+          <p:cNvPr id="3" name="Text 1"/>
+          <p:cNvSpPr/>
+          <p:nvPr/>
+        </p:nvSpPr>
+        <p:spPr>
+          <a:xfrm>
             <a:off x="0" y="5074920"/>
             <a:ext cx="12191695" cy="1463040"/>
           </a:xfrm>
@@ -2063,13 +5930,13 @@
   <p:clrMapOvr>
     <a:masterClrMapping/>
   </p:clrMapOvr>
-  <mc:AlternateContent xmlns:mc="http://schemas.openxmlformats.org/markup-compatibility/2006">
-    <mc:Choice xmlns:p159="http://schemas.microsoft.com/office/powerpoint/2015/09/main" Requires="p159">
+  <mc:AlternateContent xmlns:mc="http://schemas.openxmlformats.org/markup-compatibility/2006" xmlns:p159="http://schemas.microsoft.com/office/powerpoint/2015/09/main">
+    <mc:Choice Requires="p159">
       <p:transition xmlns:p14="http://schemas.microsoft.com/office/powerpoint/2010/main" spd="slow" p14:dur="2000">
         <p159:morph option="byObject"/>
       </p:transition>
     </mc:Choice>
-    <mc:Fallback>
+    <mc:Fallback xmlns="">
       <p:transition spd="slow">
         <p:fade/>
       </p:transition>
@@ -3310,13 +7177,13 @@
   <p:clrMapOvr>
     <a:masterClrMapping/>
   </p:clrMapOvr>
-  <mc:AlternateContent xmlns:mc="http://schemas.openxmlformats.org/markup-compatibility/2006">
-    <mc:Choice xmlns:p159="http://schemas.microsoft.com/office/powerpoint/2015/09/main" Requires="p159">
+  <mc:AlternateContent xmlns:mc="http://schemas.openxmlformats.org/markup-compatibility/2006" xmlns:p159="http://schemas.microsoft.com/office/powerpoint/2015/09/main">
+    <mc:Choice Requires="p159">
       <p:transition xmlns:p14="http://schemas.microsoft.com/office/powerpoint/2010/main" spd="slow" p14:dur="2000">
         <p159:morph option="byObject"/>
       </p:transition>
     </mc:Choice>
-    <mc:Fallback>
+    <mc:Fallback xmlns="">
       <p:transition spd="slow">
         <p:fade/>
       </p:transition>
@@ -4138,13 +8005,13 @@
   <p:clrMapOvr>
     <a:masterClrMapping/>
   </p:clrMapOvr>
-  <mc:AlternateContent xmlns:mc="http://schemas.openxmlformats.org/markup-compatibility/2006">
-    <mc:Choice xmlns:p159="http://schemas.microsoft.com/office/powerpoint/2015/09/main" Requires="p159">
+  <mc:AlternateContent xmlns:mc="http://schemas.openxmlformats.org/markup-compatibility/2006" xmlns:p159="http://schemas.microsoft.com/office/powerpoint/2015/09/main">
+    <mc:Choice Requires="p159">
       <p:transition xmlns:p14="http://schemas.microsoft.com/office/powerpoint/2010/main" spd="slow" p14:dur="2000">
         <p159:morph option="byObject"/>
       </p:transition>
     </mc:Choice>
-    <mc:Fallback>
+    <mc:Fallback xmlns="">
       <p:transition spd="slow">
         <p:fade/>
       </p:transition>
@@ -5046,13 +8913,13 @@
   <p:clrMapOvr>
     <a:masterClrMapping/>
   </p:clrMapOvr>
-  <mc:AlternateContent xmlns:mc="http://schemas.openxmlformats.org/markup-compatibility/2006">
-    <mc:Choice xmlns:p159="http://schemas.microsoft.com/office/powerpoint/2015/09/main" Requires="p159">
+  <mc:AlternateContent xmlns:mc="http://schemas.openxmlformats.org/markup-compatibility/2006" xmlns:p159="http://schemas.microsoft.com/office/powerpoint/2015/09/main">
+    <mc:Choice Requires="p159">
       <p:transition xmlns:p14="http://schemas.microsoft.com/office/powerpoint/2010/main" spd="slow" p14:dur="2000">
         <p159:morph option="byObject"/>
       </p:transition>
     </mc:Choice>
-    <mc:Fallback>
+    <mc:Fallback xmlns="">
       <p:transition spd="slow">
         <p:fade/>
       </p:transition>
@@ -7642,13 +11509,13 @@
   <p:clrMapOvr>
     <a:masterClrMapping/>
   </p:clrMapOvr>
-  <mc:AlternateContent xmlns:mc="http://schemas.openxmlformats.org/markup-compatibility/2006">
-    <mc:Choice xmlns:p159="http://schemas.microsoft.com/office/powerpoint/2015/09/main" Requires="p159">
+  <mc:AlternateContent xmlns:mc="http://schemas.openxmlformats.org/markup-compatibility/2006" xmlns:p159="http://schemas.microsoft.com/office/powerpoint/2015/09/main">
+    <mc:Choice Requires="p159">
       <p:transition xmlns:p14="http://schemas.microsoft.com/office/powerpoint/2010/main" spd="slow" p14:dur="2000">
         <p159:morph option="byObject"/>
       </p:transition>
     </mc:Choice>
-    <mc:Fallback>
+    <mc:Fallback xmlns="">
       <p:transition spd="slow">
         <p:fade/>
       </p:transition>
@@ -8466,13 +12333,13 @@
   <p:clrMapOvr>
     <a:masterClrMapping/>
   </p:clrMapOvr>
-  <mc:AlternateContent xmlns:mc="http://schemas.openxmlformats.org/markup-compatibility/2006">
-    <mc:Choice xmlns:p159="http://schemas.microsoft.com/office/powerpoint/2015/09/main" Requires="p159">
+  <mc:AlternateContent xmlns:mc="http://schemas.openxmlformats.org/markup-compatibility/2006" xmlns:p159="http://schemas.microsoft.com/office/powerpoint/2015/09/main">
+    <mc:Choice Requires="p159">
       <p:transition xmlns:p14="http://schemas.microsoft.com/office/powerpoint/2010/main" spd="slow" p14:dur="2000">
         <p159:morph option="byObject"/>
       </p:transition>
     </mc:Choice>
-    <mc:Fallback>
+    <mc:Fallback xmlns="">
       <p:transition spd="slow">
         <p:fade/>
       </p:transition>
@@ -11062,13 +14929,13 @@
   <p:clrMapOvr>
     <a:masterClrMapping/>
   </p:clrMapOvr>
-  <mc:AlternateContent xmlns:mc="http://schemas.openxmlformats.org/markup-compatibility/2006">
-    <mc:Choice xmlns:p159="http://schemas.microsoft.com/office/powerpoint/2015/09/main" Requires="p159">
+  <mc:AlternateContent xmlns:mc="http://schemas.openxmlformats.org/markup-compatibility/2006" xmlns:p159="http://schemas.microsoft.com/office/powerpoint/2015/09/main">
+    <mc:Choice Requires="p159">
       <p:transition xmlns:p14="http://schemas.microsoft.com/office/powerpoint/2010/main" spd="slow" p14:dur="2000">
         <p159:morph option="byObject"/>
       </p:transition>
     </mc:Choice>
-    <mc:Fallback>
+    <mc:Fallback xmlns="">
       <p:transition spd="slow">
         <p:fade/>
       </p:transition>
@@ -11886,13 +15753,13 @@
   <p:clrMapOvr>
     <a:masterClrMapping/>
   </p:clrMapOvr>
-  <mc:AlternateContent xmlns:mc="http://schemas.openxmlformats.org/markup-compatibility/2006">
-    <mc:Choice xmlns:p159="http://schemas.microsoft.com/office/powerpoint/2015/09/main" Requires="p159">
+  <mc:AlternateContent xmlns:mc="http://schemas.openxmlformats.org/markup-compatibility/2006" xmlns:p159="http://schemas.microsoft.com/office/powerpoint/2015/09/main">
+    <mc:Choice Requires="p159">
       <p:transition xmlns:p14="http://schemas.microsoft.com/office/powerpoint/2010/main" spd="slow" p14:dur="2000">
         <p159:morph option="byObject"/>
       </p:transition>
     </mc:Choice>
-    <mc:Fallback>
+    <mc:Fallback xmlns="">
       <p:transition spd="slow">
         <p:fade/>
       </p:transition>
@@ -14471,13 +18338,13 @@
   <p:clrMapOvr>
     <a:masterClrMapping/>
   </p:clrMapOvr>
-  <mc:AlternateContent xmlns:mc="http://schemas.openxmlformats.org/markup-compatibility/2006">
-    <mc:Choice xmlns:p159="http://schemas.microsoft.com/office/powerpoint/2015/09/main" Requires="p159">
+  <mc:AlternateContent xmlns:mc="http://schemas.openxmlformats.org/markup-compatibility/2006" xmlns:p159="http://schemas.microsoft.com/office/powerpoint/2015/09/main">
+    <mc:Choice Requires="p159">
       <p:transition xmlns:p14="http://schemas.microsoft.com/office/powerpoint/2010/main" spd="slow" p14:dur="2000">
         <p159:morph option="byObject"/>
       </p:transition>
     </mc:Choice>
-    <mc:Fallback>
+    <mc:Fallback xmlns="">
       <p:transition spd="slow">
         <p:fade/>
       </p:transition>
